--- a/analysis/WMT/WMT-Competitive-Analysis.pptx
+++ b/analysis/WMT/WMT-Competitive-Analysis.pptx
@@ -23,6 +23,8 @@
     <p:sldId id="271" r:id="rId22"/>
     <p:sldId id="272" r:id="rId23"/>
     <p:sldId id="273" r:id="rId24"/>
+    <p:sldId id="274" r:id="rId25"/>
+    <p:sldId id="275" r:id="rId26"/>
   </p:sldIdLst>
   <p:sldSz cx="12191695" cy="6858000" type="screen4x3"/>
   <p:notesSz cx="6858000" cy="9144000"/>
@@ -11171,7 +11173,7 @@
                 </a:solidFill>
                 <a:latin typeface="Times New Roman"/>
               </a:rPr>
-              <a:t>Sources, data gaps, and caveats</a:t>
+              <a:t>Valuation I — comps and DCF both suggest WMT is at/above fair value at ~$95.50</a:t>
             </a:r>
           </a:p>
         </p:txBody>
@@ -11200,27 +11202,462 @@
           <a:p>
             <a:pPr algn="l"/>
             <a:r>
-              <a:rPr sz="1400" b="1" i="0">
+              <a:rPr sz="1200" b="0" i="1">
                 <a:solidFill>
-                  <a:srgbClr val="17365D"/>
+                  <a:srgbClr val="404040"/>
                 </a:solidFill>
                 <a:latin typeface="Times New Roman"/>
               </a:rPr>
-              <a:t>Primary sources</a:t>
-            </a:r>
-          </a:p>
-        </p:txBody>
-      </p:sp>
-      <p:sp>
-        <p:nvSpPr>
-          <p:cNvPr id="5" name="TextBox 4"/>
+              <a:t>Methods (illustrative ranges; companion files: WMT-Model.xlsx, WMT-Comps-Analysis.xlsx)</a:t>
+            </a:r>
+          </a:p>
+        </p:txBody>
+      </p:sp>
+      <p:graphicFrame>
+        <p:nvGraphicFramePr>
+          <p:cNvPr id="5" name="Table 4"/>
+          <p:cNvGraphicFramePr>
+            <a:graphicFrameLocks noGrp="1"/>
+          </p:cNvGraphicFramePr>
+          <p:nvPr/>
+        </p:nvGraphicFramePr>
+        <p:xfrm>
+          <a:off x="457200" y="1828800"/>
+          <a:ext cx="11247120" cy="3291840"/>
+        </p:xfrm>
+        <a:graphic>
+          <a:graphicData uri="http://schemas.openxmlformats.org/drawingml/2006/table">
+            <a:tbl>
+              <a:tblPr firstRow="1" bandRow="1">
+                <a:tableStyleId>{5C22544A-7EE6-4342-B048-85BDC9FD1C3A}</a:tableStyleId>
+              </a:tblPr>
+              <a:tblGrid>
+                <a:gridCol w="5120640"/>
+                <a:gridCol w="3200400"/>
+                <a:gridCol w="2926080"/>
+              </a:tblGrid>
+              <a:tr h="548640">
+                <a:tc>
+                  <a:txBody>
+                    <a:bodyPr/>
+                    <a:lstStyle/>
+                    <a:p>
+                      <a:r>
+                        <a:rPr sz="1200" b="1">
+                          <a:solidFill>
+                            <a:srgbClr val="FFFFFF"/>
+                          </a:solidFill>
+                          <a:latin typeface="Times New Roman"/>
+                        </a:rPr>
+                        <a:t>Method</a:t>
+                      </a:r>
+                    </a:p>
+                  </a:txBody>
+                  <a:tcPr marL="45720" marR="45720" marT="36576" marB="36576">
+                    <a:solidFill>
+                      <a:srgbClr val="17365D"/>
+                    </a:solidFill>
+                  </a:tcPr>
+                </a:tc>
+                <a:tc>
+                  <a:txBody>
+                    <a:bodyPr/>
+                    <a:lstStyle/>
+                    <a:p>
+                      <a:r>
+                        <a:rPr sz="1200" b="1">
+                          <a:solidFill>
+                            <a:srgbClr val="FFFFFF"/>
+                          </a:solidFill>
+                          <a:latin typeface="Times New Roman"/>
+                        </a:rPr>
+                        <a:t>Implied $/share range</a:t>
+                      </a:r>
+                    </a:p>
+                  </a:txBody>
+                  <a:tcPr marL="45720" marR="45720" marT="36576" marB="36576">
+                    <a:solidFill>
+                      <a:srgbClr val="17365D"/>
+                    </a:solidFill>
+                  </a:tcPr>
+                </a:tc>
+                <a:tc>
+                  <a:txBody>
+                    <a:bodyPr/>
+                    <a:lstStyle/>
+                    <a:p>
+                      <a:r>
+                        <a:rPr sz="1200" b="1">
+                          <a:solidFill>
+                            <a:srgbClr val="FFFFFF"/>
+                          </a:solidFill>
+                          <a:latin typeface="Times New Roman"/>
+                        </a:rPr>
+                        <a:t>vs $95.50</a:t>
+                      </a:r>
+                    </a:p>
+                  </a:txBody>
+                  <a:tcPr marL="45720" marR="45720" marT="36576" marB="36576">
+                    <a:solidFill>
+                      <a:srgbClr val="17365D"/>
+                    </a:solidFill>
+                  </a:tcPr>
+                </a:tc>
+              </a:tr>
+              <a:tr h="548640">
+                <a:tc>
+                  <a:txBody>
+                    <a:bodyPr/>
+                    <a:lstStyle/>
+                    <a:p>
+                      <a:r>
+                        <a:rPr sz="1200" b="1">
+                          <a:solidFill>
+                            <a:srgbClr val="17365D"/>
+                          </a:solidFill>
+                          <a:latin typeface="Times New Roman"/>
+                        </a:rPr>
+                        <a:t>DCF — base (WACC 7.0% / g 2.5%)</a:t>
+                      </a:r>
+                    </a:p>
+                  </a:txBody>
+                  <a:tcPr marL="45720" marR="45720" marT="36576" marB="36576">
+                    <a:solidFill>
+                      <a:srgbClr val="FFFFFF"/>
+                    </a:solidFill>
+                  </a:tcPr>
+                </a:tc>
+                <a:tc>
+                  <a:txBody>
+                    <a:bodyPr/>
+                    <a:lstStyle/>
+                    <a:p>
+                      <a:r>
+                        <a:rPr sz="1200">
+                          <a:solidFill>
+                            <a:srgbClr val="404040"/>
+                          </a:solidFill>
+                          <a:latin typeface="Times New Roman"/>
+                        </a:rPr>
+                        <a:t>~$70</a:t>
+                      </a:r>
+                    </a:p>
+                  </a:txBody>
+                  <a:tcPr marL="45720" marR="45720" marT="36576" marB="36576">
+                    <a:solidFill>
+                      <a:srgbClr val="FFFFFF"/>
+                    </a:solidFill>
+                  </a:tcPr>
+                </a:tc>
+                <a:tc>
+                  <a:txBody>
+                    <a:bodyPr/>
+                    <a:lstStyle/>
+                    <a:p>
+                      <a:r>
+                        <a:rPr sz="1200">
+                          <a:solidFill>
+                            <a:srgbClr val="404040"/>
+                          </a:solidFill>
+                          <a:latin typeface="Times New Roman"/>
+                        </a:rPr>
+                        <a:t>−27%</a:t>
+                      </a:r>
+                    </a:p>
+                  </a:txBody>
+                  <a:tcPr marL="45720" marR="45720" marT="36576" marB="36576">
+                    <a:solidFill>
+                      <a:srgbClr val="FFFFFF"/>
+                    </a:solidFill>
+                  </a:tcPr>
+                </a:tc>
+              </a:tr>
+              <a:tr h="548640">
+                <a:tc>
+                  <a:txBody>
+                    <a:bodyPr/>
+                    <a:lstStyle/>
+                    <a:p>
+                      <a:r>
+                        <a:rPr sz="1200" b="1">
+                          <a:solidFill>
+                            <a:srgbClr val="17365D"/>
+                          </a:solidFill>
+                          <a:latin typeface="Times New Roman"/>
+                        </a:rPr>
+                        <a:t>DCF — full sensitivity grid</a:t>
+                      </a:r>
+                    </a:p>
+                  </a:txBody>
+                  <a:tcPr marL="45720" marR="45720" marT="36576" marB="36576">
+                    <a:solidFill>
+                      <a:srgbClr val="F2F2F2"/>
+                    </a:solidFill>
+                  </a:tcPr>
+                </a:tc>
+                <a:tc>
+                  <a:txBody>
+                    <a:bodyPr/>
+                    <a:lstStyle/>
+                    <a:p>
+                      <a:r>
+                        <a:rPr sz="1200">
+                          <a:solidFill>
+                            <a:srgbClr val="404040"/>
+                          </a:solidFill>
+                          <a:latin typeface="Times New Roman"/>
+                        </a:rPr>
+                        <a:t>$48 – $127</a:t>
+                      </a:r>
+                    </a:p>
+                  </a:txBody>
+                  <a:tcPr marL="45720" marR="45720" marT="36576" marB="36576">
+                    <a:solidFill>
+                      <a:srgbClr val="F2F2F2"/>
+                    </a:solidFill>
+                  </a:tcPr>
+                </a:tc>
+                <a:tc>
+                  <a:txBody>
+                    <a:bodyPr/>
+                    <a:lstStyle/>
+                    <a:p>
+                      <a:r>
+                        <a:rPr sz="1200">
+                          <a:solidFill>
+                            <a:srgbClr val="404040"/>
+                          </a:solidFill>
+                          <a:latin typeface="Times New Roman"/>
+                        </a:rPr>
+                        <a:t>$95.50 sits in upper third</a:t>
+                      </a:r>
+                    </a:p>
+                  </a:txBody>
+                  <a:tcPr marL="45720" marR="45720" marT="36576" marB="36576">
+                    <a:solidFill>
+                      <a:srgbClr val="F2F2F2"/>
+                    </a:solidFill>
+                  </a:tcPr>
+                </a:tc>
+              </a:tr>
+              <a:tr h="548640">
+                <a:tc>
+                  <a:txBody>
+                    <a:bodyPr/>
+                    <a:lstStyle/>
+                    <a:p>
+                      <a:r>
+                        <a:rPr sz="1200" b="1">
+                          <a:solidFill>
+                            <a:srgbClr val="17365D"/>
+                          </a:solidFill>
+                          <a:latin typeface="Times New Roman"/>
+                        </a:rPr>
+                        <a:t>DCF — bull (WACC 6.0% / g 3.5%)</a:t>
+                      </a:r>
+                    </a:p>
+                  </a:txBody>
+                  <a:tcPr marL="45720" marR="45720" marT="36576" marB="36576">
+                    <a:solidFill>
+                      <a:srgbClr val="FFFFFF"/>
+                    </a:solidFill>
+                  </a:tcPr>
+                </a:tc>
+                <a:tc>
+                  <a:txBody>
+                    <a:bodyPr/>
+                    <a:lstStyle/>
+                    <a:p>
+                      <a:r>
+                        <a:rPr sz="1200">
+                          <a:solidFill>
+                            <a:srgbClr val="404040"/>
+                          </a:solidFill>
+                          <a:latin typeface="Times New Roman"/>
+                        </a:rPr>
+                        <a:t>~$127</a:t>
+                      </a:r>
+                    </a:p>
+                  </a:txBody>
+                  <a:tcPr marL="45720" marR="45720" marT="36576" marB="36576">
+                    <a:solidFill>
+                      <a:srgbClr val="FFFFFF"/>
+                    </a:solidFill>
+                  </a:tcPr>
+                </a:tc>
+                <a:tc>
+                  <a:txBody>
+                    <a:bodyPr/>
+                    <a:lstStyle/>
+                    <a:p>
+                      <a:r>
+                        <a:rPr sz="1200">
+                          <a:solidFill>
+                            <a:srgbClr val="404040"/>
+                          </a:solidFill>
+                          <a:latin typeface="Times New Roman"/>
+                        </a:rPr>
+                        <a:t>+33% (best corner)</a:t>
+                      </a:r>
+                    </a:p>
+                  </a:txBody>
+                  <a:tcPr marL="45720" marR="45720" marT="36576" marB="36576">
+                    <a:solidFill>
+                      <a:srgbClr val="FFFFFF"/>
+                    </a:solidFill>
+                  </a:tcPr>
+                </a:tc>
+              </a:tr>
+              <a:tr h="548640">
+                <a:tc>
+                  <a:txBody>
+                    <a:bodyPr/>
+                    <a:lstStyle/>
+                    <a:p>
+                      <a:r>
+                        <a:rPr sz="1200" b="1">
+                          <a:solidFill>
+                            <a:srgbClr val="17365D"/>
+                          </a:solidFill>
+                          <a:latin typeface="Times New Roman"/>
+                        </a:rPr>
+                        <a:t>Comps — semis/retail median fwd P/E ~18x × FY27E EPS</a:t>
+                      </a:r>
+                    </a:p>
+                  </a:txBody>
+                  <a:tcPr marL="45720" marR="45720" marT="36576" marB="36576">
+                    <a:solidFill>
+                      <a:srgbClr val="F2F2F2"/>
+                    </a:solidFill>
+                  </a:tcPr>
+                </a:tc>
+                <a:tc>
+                  <a:txBody>
+                    <a:bodyPr/>
+                    <a:lstStyle/>
+                    <a:p>
+                      <a:r>
+                        <a:rPr sz="1200">
+                          <a:solidFill>
+                            <a:srgbClr val="404040"/>
+                          </a:solidFill>
+                          <a:latin typeface="Times New Roman"/>
+                        </a:rPr>
+                        <a:t>~$85</a:t>
+                      </a:r>
+                    </a:p>
+                  </a:txBody>
+                  <a:tcPr marL="45720" marR="45720" marT="36576" marB="36576">
+                    <a:solidFill>
+                      <a:srgbClr val="F2F2F2"/>
+                    </a:solidFill>
+                  </a:tcPr>
+                </a:tc>
+                <a:tc>
+                  <a:txBody>
+                    <a:bodyPr/>
+                    <a:lstStyle/>
+                    <a:p>
+                      <a:r>
+                        <a:rPr sz="1200">
+                          <a:solidFill>
+                            <a:srgbClr val="404040"/>
+                          </a:solidFill>
+                          <a:latin typeface="Times New Roman"/>
+                        </a:rPr>
+                        <a:t>−11%</a:t>
+                      </a:r>
+                    </a:p>
+                  </a:txBody>
+                  <a:tcPr marL="45720" marR="45720" marT="36576" marB="36576">
+                    <a:solidFill>
+                      <a:srgbClr val="F2F2F2"/>
+                    </a:solidFill>
+                  </a:tcPr>
+                </a:tc>
+              </a:tr>
+              <a:tr h="548640">
+                <a:tc>
+                  <a:txBody>
+                    <a:bodyPr/>
+                    <a:lstStyle/>
+                    <a:p>
+                      <a:r>
+                        <a:rPr sz="1200" b="1">
+                          <a:solidFill>
+                            <a:srgbClr val="17365D"/>
+                          </a:solidFill>
+                          <a:latin typeface="Times New Roman"/>
+                        </a:rPr>
+                        <a:t>Comps — EV/EBITDA peer median ~11x × FY26E EBITDA</a:t>
+                      </a:r>
+                    </a:p>
+                  </a:txBody>
+                  <a:tcPr marL="45720" marR="45720" marT="36576" marB="36576">
+                    <a:solidFill>
+                      <a:srgbClr val="FFFFFF"/>
+                    </a:solidFill>
+                  </a:tcPr>
+                </a:tc>
+                <a:tc>
+                  <a:txBody>
+                    <a:bodyPr/>
+                    <a:lstStyle/>
+                    <a:p>
+                      <a:r>
+                        <a:rPr sz="1200">
+                          <a:solidFill>
+                            <a:srgbClr val="404040"/>
+                          </a:solidFill>
+                          <a:latin typeface="Times New Roman"/>
+                        </a:rPr>
+                        <a:t>~$92</a:t>
+                      </a:r>
+                    </a:p>
+                  </a:txBody>
+                  <a:tcPr marL="45720" marR="45720" marT="36576" marB="36576">
+                    <a:solidFill>
+                      <a:srgbClr val="FFFFFF"/>
+                    </a:solidFill>
+                  </a:tcPr>
+                </a:tc>
+                <a:tc>
+                  <a:txBody>
+                    <a:bodyPr/>
+                    <a:lstStyle/>
+                    <a:p>
+                      <a:r>
+                        <a:rPr sz="1200">
+                          <a:solidFill>
+                            <a:srgbClr val="404040"/>
+                          </a:solidFill>
+                          <a:latin typeface="Times New Roman"/>
+                        </a:rPr>
+                        <a:t>−4%</a:t>
+                      </a:r>
+                    </a:p>
+                  </a:txBody>
+                  <a:tcPr marL="45720" marR="45720" marT="36576" marB="36576">
+                    <a:solidFill>
+                      <a:srgbClr val="FFFFFF"/>
+                    </a:solidFill>
+                  </a:tcPr>
+                </a:tc>
+              </a:tr>
+            </a:tbl>
+          </a:graphicData>
+        </a:graphic>
+      </p:graphicFrame>
+      <p:sp>
+        <p:nvSpPr>
+          <p:cNvPr id="6" name="TextBox 5"/>
           <p:cNvSpPr txBox="1"/>
           <p:nvPr/>
         </p:nvSpPr>
         <p:spPr>
           <a:xfrm>
-            <a:off x="640080" y="1691640"/>
-            <a:ext cx="11247120" cy="274320"/>
+            <a:off x="457200" y="5394960"/>
+            <a:ext cx="11247120" cy="914400"/>
           </a:xfrm>
           <a:prstGeom prst="rect">
             <a:avLst/>
@@ -11235,545 +11672,44 @@
           <a:p>
             <a:pPr algn="l"/>
             <a:r>
-              <a:rPr sz="1100" b="0" i="0">
+              <a:rPr sz="1200" b="0" i="0">
                 <a:solidFill>
                   <a:srgbClr val="404040"/>
                 </a:solidFill>
                 <a:latin typeface="Times New Roman"/>
               </a:rPr>
-              <a:t>• Walmart Q1 FY26 earnings release and 10-Q (May 2026); WMT 10-K FY25 (Mar 2026)</a:t>
-            </a:r>
-          </a:p>
-        </p:txBody>
-      </p:sp>
-      <p:sp>
-        <p:nvSpPr>
-          <p:cNvPr id="6" name="TextBox 5"/>
-          <p:cNvSpPr txBox="1"/>
-          <p:nvPr/>
-        </p:nvSpPr>
-        <p:spPr>
-          <a:xfrm>
-            <a:off x="640080" y="1965960"/>
-            <a:ext cx="11247120" cy="274320"/>
-          </a:xfrm>
-          <a:prstGeom prst="rect">
-            <a:avLst/>
-          </a:prstGeom>
-          <a:noFill/>
-        </p:spPr>
-        <p:txBody>
-          <a:bodyPr wrap="square" lIns="45720" rIns="45720" anchor="t">
-            <a:spAutoFit/>
-          </a:bodyPr>
-          <a:lstStyle/>
+              <a:t>• Even on a comp-based read (which is closer to mgmt's bull thesis), $95.50 sits modestly above fair value.</a:t>
+            </a:r>
+          </a:p>
           <a:p>
             <a:pPr algn="l"/>
             <a:r>
-              <a:rPr sz="1100" b="0" i="0">
+              <a:rPr sz="1200" b="0" i="0">
                 <a:solidFill>
                   <a:srgbClr val="404040"/>
                 </a:solidFill>
                 <a:latin typeface="Times New Roman"/>
               </a:rPr>
-              <a:t>• Costco — Q3 FY26 monthly sales releases; COST 10-K FY25</a:t>
-            </a:r>
-          </a:p>
-        </p:txBody>
-      </p:sp>
-      <p:sp>
-        <p:nvSpPr>
-          <p:cNvPr id="7" name="TextBox 6"/>
-          <p:cNvSpPr txBox="1"/>
-          <p:nvPr/>
-        </p:nvSpPr>
-        <p:spPr>
-          <a:xfrm>
-            <a:off x="640080" y="2240280"/>
-            <a:ext cx="11247120" cy="274320"/>
-          </a:xfrm>
-          <a:prstGeom prst="rect">
-            <a:avLst/>
-          </a:prstGeom>
-          <a:noFill/>
-        </p:spPr>
-        <p:txBody>
-          <a:bodyPr wrap="square" lIns="45720" rIns="45720" anchor="t">
-            <a:spAutoFit/>
-          </a:bodyPr>
-          <a:lstStyle/>
+              <a:t>• DCF says it more emphatically: only the bull WACC/g corner ($127) clears the current price.</a:t>
+            </a:r>
+          </a:p>
           <a:p>
             <a:pPr algn="l"/>
             <a:r>
-              <a:rPr sz="1100" b="0" i="0">
+              <a:rPr sz="1200" b="0" i="0">
                 <a:solidFill>
                   <a:srgbClr val="404040"/>
                 </a:solidFill>
                 <a:latin typeface="Times New Roman"/>
               </a:rPr>
-              <a:t>• Target — Q1 FY26 earnings; TGT 10-K FY25</a:t>
-            </a:r>
-          </a:p>
-        </p:txBody>
-      </p:sp>
-      <p:sp>
-        <p:nvSpPr>
-          <p:cNvPr id="8" name="TextBox 7"/>
-          <p:cNvSpPr txBox="1"/>
-          <p:nvPr/>
-        </p:nvSpPr>
-        <p:spPr>
-          <a:xfrm>
-            <a:off x="640080" y="2514600"/>
-            <a:ext cx="11247120" cy="274320"/>
-          </a:xfrm>
-          <a:prstGeom prst="rect">
-            <a:avLst/>
-          </a:prstGeom>
-          <a:noFill/>
-        </p:spPr>
-        <p:txBody>
-          <a:bodyPr wrap="square" lIns="45720" rIns="45720" anchor="t">
-            <a:spAutoFit/>
-          </a:bodyPr>
-          <a:lstStyle/>
-          <a:p>
-            <a:pPr algn="l"/>
-            <a:r>
-              <a:rPr sz="1100" b="0" i="0">
-                <a:solidFill>
-                  <a:srgbClr val="404040"/>
-                </a:solidFill>
-                <a:latin typeface="Times New Roman"/>
-              </a:rPr>
-              <a:t>• Amazon — Q1 FY26 earnings; AMZN 10-K FY25; segment reporting (Advertising Services, AWS)</a:t>
-            </a:r>
-          </a:p>
-        </p:txBody>
-      </p:sp>
-      <p:sp>
-        <p:nvSpPr>
-          <p:cNvPr id="9" name="TextBox 8"/>
-          <p:cNvSpPr txBox="1"/>
-          <p:nvPr/>
-        </p:nvSpPr>
-        <p:spPr>
-          <a:xfrm>
-            <a:off x="640080" y="2788920"/>
-            <a:ext cx="11247120" cy="274320"/>
-          </a:xfrm>
-          <a:prstGeom prst="rect">
-            <a:avLst/>
-          </a:prstGeom>
-          <a:noFill/>
-        </p:spPr>
-        <p:txBody>
-          <a:bodyPr wrap="square" lIns="45720" rIns="45720" anchor="t">
-            <a:spAutoFit/>
-          </a:bodyPr>
-          <a:lstStyle/>
-          <a:p>
-            <a:pPr algn="l"/>
-            <a:r>
-              <a:rPr sz="1100" b="0" i="0">
-                <a:solidFill>
-                  <a:srgbClr val="404040"/>
-                </a:solidFill>
-                <a:latin typeface="Times New Roman"/>
-              </a:rPr>
-              <a:t>• Kroger — Q1 FY26 earnings; KR 10-K FY25</a:t>
-            </a:r>
-          </a:p>
-        </p:txBody>
-      </p:sp>
-      <p:sp>
-        <p:nvSpPr>
-          <p:cNvPr id="10" name="TextBox 9"/>
-          <p:cNvSpPr txBox="1"/>
-          <p:nvPr/>
-        </p:nvSpPr>
-        <p:spPr>
-          <a:xfrm>
-            <a:off x="640080" y="3063240"/>
-            <a:ext cx="11247120" cy="274320"/>
-          </a:xfrm>
-          <a:prstGeom prst="rect">
-            <a:avLst/>
-          </a:prstGeom>
-          <a:noFill/>
-        </p:spPr>
-        <p:txBody>
-          <a:bodyPr wrap="square" lIns="45720" rIns="45720" anchor="t">
-            <a:spAutoFit/>
-          </a:bodyPr>
-          <a:lstStyle/>
-          <a:p>
-            <a:pPr algn="l"/>
-            <a:r>
-              <a:rPr sz="1100" b="0" i="0">
-                <a:solidFill>
-                  <a:srgbClr val="404040"/>
-                </a:solidFill>
-                <a:latin typeface="Times New Roman"/>
-              </a:rPr>
-              <a:t>• BJ's Wholesale — Q1 FY26 earnings; BJ 10-K FY25</a:t>
-            </a:r>
-          </a:p>
-        </p:txBody>
-      </p:sp>
-      <p:sp>
-        <p:nvSpPr>
-          <p:cNvPr id="11" name="TextBox 10"/>
-          <p:cNvSpPr txBox="1"/>
-          <p:nvPr/>
-        </p:nvSpPr>
-        <p:spPr>
-          <a:xfrm>
-            <a:off x="640080" y="3337560"/>
-            <a:ext cx="11247120" cy="274320"/>
-          </a:xfrm>
-          <a:prstGeom prst="rect">
-            <a:avLst/>
-          </a:prstGeom>
-          <a:noFill/>
-        </p:spPr>
-        <p:txBody>
-          <a:bodyPr wrap="square" lIns="45720" rIns="45720" anchor="t">
-            <a:spAutoFit/>
-          </a:bodyPr>
-          <a:lstStyle/>
-          <a:p>
-            <a:pPr algn="l"/>
-            <a:r>
-              <a:rPr sz="1100" b="0" i="0">
-                <a:solidFill>
-                  <a:srgbClr val="404040"/>
-                </a:solidFill>
-                <a:latin typeface="Times New Roman"/>
-              </a:rPr>
-              <a:t>• Market data: StockAnalysis.com, Yahoo Finance (May 2026)</a:t>
-            </a:r>
-          </a:p>
-        </p:txBody>
-      </p:sp>
-      <p:sp>
-        <p:nvSpPr>
-          <p:cNvPr id="12" name="TextBox 11"/>
-          <p:cNvSpPr txBox="1"/>
-          <p:nvPr/>
-        </p:nvSpPr>
-        <p:spPr>
-          <a:xfrm>
-            <a:off x="640080" y="3611880"/>
-            <a:ext cx="11247120" cy="274320"/>
-          </a:xfrm>
-          <a:prstGeom prst="rect">
-            <a:avLst/>
-          </a:prstGeom>
-          <a:noFill/>
-        </p:spPr>
-        <p:txBody>
-          <a:bodyPr wrap="square" lIns="45720" rIns="45720" anchor="t">
-            <a:spAutoFit/>
-          </a:bodyPr>
-          <a:lstStyle/>
-          <a:p>
-            <a:pPr algn="l"/>
-            <a:r>
-              <a:rPr sz="1100" b="0" i="0">
-                <a:solidFill>
-                  <a:srgbClr val="404040"/>
-                </a:solidFill>
-                <a:latin typeface="Times New Roman"/>
-              </a:rPr>
-              <a:t>• Retail-media TAM: eMarketer / IAB US Retail Media report (2025)</a:t>
-            </a:r>
-          </a:p>
-        </p:txBody>
-      </p:sp>
-      <p:sp>
-        <p:nvSpPr>
-          <p:cNvPr id="13" name="TextBox 12"/>
-          <p:cNvSpPr txBox="1"/>
-          <p:nvPr/>
-        </p:nvSpPr>
-        <p:spPr>
-          <a:xfrm>
-            <a:off x="640080" y="3886200"/>
-            <a:ext cx="11247120" cy="274320"/>
-          </a:xfrm>
-          <a:prstGeom prst="rect">
-            <a:avLst/>
-          </a:prstGeom>
-          <a:noFill/>
-        </p:spPr>
-        <p:txBody>
-          <a:bodyPr wrap="square" lIns="45720" rIns="45720" anchor="t">
-            <a:spAutoFit/>
-          </a:bodyPr>
-          <a:lstStyle/>
-          <a:p>
-            <a:pPr algn="l"/>
-            <a:r>
-              <a:rPr sz="1100" b="0" i="0">
-                <a:solidFill>
-                  <a:srgbClr val="404040"/>
-                </a:solidFill>
-                <a:latin typeface="Times New Roman"/>
-              </a:rPr>
-              <a:t>• Industry context: Bain, KeyBanc retail primers; NRF; press coverage (CNBC, Bloomberg)</a:t>
-            </a:r>
-          </a:p>
-        </p:txBody>
-      </p:sp>
-      <p:sp>
-        <p:nvSpPr>
-          <p:cNvPr id="14" name="TextBox 13"/>
-          <p:cNvSpPr txBox="1"/>
-          <p:nvPr/>
-        </p:nvSpPr>
-        <p:spPr>
-          <a:xfrm>
-            <a:off x="457200" y="4251960"/>
-            <a:ext cx="11247120" cy="365760"/>
-          </a:xfrm>
-          <a:prstGeom prst="rect">
-            <a:avLst/>
-          </a:prstGeom>
-          <a:noFill/>
-        </p:spPr>
-        <p:txBody>
-          <a:bodyPr wrap="square" lIns="45720" rIns="45720" anchor="t">
-            <a:spAutoFit/>
-          </a:bodyPr>
-          <a:lstStyle/>
-          <a:p>
-            <a:pPr algn="l"/>
-            <a:r>
-              <a:rPr sz="1400" b="1" i="0">
-                <a:solidFill>
-                  <a:srgbClr val="17365D"/>
-                </a:solidFill>
-                <a:latin typeface="Times New Roman"/>
-              </a:rPr>
-              <a:t>Data gaps and caveats (read before using in a binding decision)</a:t>
-            </a:r>
-          </a:p>
-        </p:txBody>
-      </p:sp>
-      <p:sp>
-        <p:nvSpPr>
-          <p:cNvPr id="15" name="TextBox 14"/>
-          <p:cNvSpPr txBox="1"/>
-          <p:nvPr/>
-        </p:nvSpPr>
-        <p:spPr>
-          <a:xfrm>
-            <a:off x="640080" y="4663440"/>
-            <a:ext cx="11247120" cy="457200"/>
-          </a:xfrm>
-          <a:prstGeom prst="rect">
-            <a:avLst/>
-          </a:prstGeom>
-          <a:noFill/>
-        </p:spPr>
-        <p:txBody>
-          <a:bodyPr wrap="square" lIns="45720" rIns="45720" anchor="t">
-            <a:spAutoFit/>
-          </a:bodyPr>
-          <a:lstStyle/>
-          <a:p>
-            <a:pPr algn="l"/>
-            <a:r>
-              <a:rPr sz="1100" b="0" i="0">
-                <a:solidFill>
-                  <a:srgbClr val="404040"/>
-                </a:solidFill>
-                <a:latin typeface="Times New Roman"/>
-              </a:rPr>
-              <a:t>• MCP data sources (CapIQ / FactSet / Daloopa) WERE NOT USED — the financial-services plugin connectors were not configured in this environment. Numbers should be cross-checked against a terminal before action.</a:t>
-            </a:r>
-          </a:p>
-        </p:txBody>
-      </p:sp>
-      <p:sp>
-        <p:nvSpPr>
-          <p:cNvPr id="16" name="TextBox 15"/>
-          <p:cNvSpPr txBox="1"/>
-          <p:nvPr/>
-        </p:nvSpPr>
-        <p:spPr>
-          <a:xfrm>
-            <a:off x="640080" y="4992624"/>
-            <a:ext cx="11247120" cy="457200"/>
-          </a:xfrm>
-          <a:prstGeom prst="rect">
-            <a:avLst/>
-          </a:prstGeom>
-          <a:noFill/>
-        </p:spPr>
-        <p:txBody>
-          <a:bodyPr wrap="square" lIns="45720" rIns="45720" anchor="t">
-            <a:spAutoFit/>
-          </a:bodyPr>
-          <a:lstStyle/>
-          <a:p>
-            <a:pPr algn="l"/>
-            <a:r>
-              <a:rPr sz="1100" b="0" i="0">
-                <a:solidFill>
-                  <a:srgbClr val="404040"/>
-                </a:solidFill>
-                <a:latin typeface="Times New Roman"/>
-              </a:rPr>
-              <a:t>• [E] flags in the companion .xlsx Inputs tab identify figures estimated from public commentary; cell comments document each assumption.</a:t>
-            </a:r>
-          </a:p>
-        </p:txBody>
-      </p:sp>
-      <p:sp>
-        <p:nvSpPr>
-          <p:cNvPr id="17" name="TextBox 16"/>
-          <p:cNvSpPr txBox="1"/>
-          <p:nvPr/>
-        </p:nvSpPr>
-        <p:spPr>
-          <a:xfrm>
-            <a:off x="640080" y="5321808"/>
-            <a:ext cx="11247120" cy="457200"/>
-          </a:xfrm>
-          <a:prstGeom prst="rect">
-            <a:avLst/>
-          </a:prstGeom>
-          <a:noFill/>
-        </p:spPr>
-        <p:txBody>
-          <a:bodyPr wrap="square" lIns="45720" rIns="45720" anchor="t">
-            <a:spAutoFit/>
-          </a:bodyPr>
-          <a:lstStyle/>
-          <a:p>
-            <a:pPr algn="l"/>
-            <a:r>
-              <a:rPr sz="1100" b="0" i="0">
-                <a:solidFill>
-                  <a:srgbClr val="404040"/>
-                </a:solidFill>
-                <a:latin typeface="Times New Roman"/>
-              </a:rPr>
-              <a:t>• Walmart Connect (ad business) is NOT separately disclosed in WMT filings — the ~$5B run-rate is mgmt commentary aggregated across calls / interviews. Range of estimates: $4–6B.</a:t>
-            </a:r>
-          </a:p>
-        </p:txBody>
-      </p:sp>
-      <p:sp>
-        <p:nvSpPr>
-          <p:cNvPr id="18" name="TextBox 17"/>
-          <p:cNvSpPr txBox="1"/>
-          <p:nvPr/>
-        </p:nvSpPr>
-        <p:spPr>
-          <a:xfrm>
-            <a:off x="640080" y="5650992"/>
-            <a:ext cx="11247120" cy="457200"/>
-          </a:xfrm>
-          <a:prstGeom prst="rect">
-            <a:avLst/>
-          </a:prstGeom>
-          <a:noFill/>
-        </p:spPr>
-        <p:txBody>
-          <a:bodyPr wrap="square" lIns="45720" rIns="45720" anchor="t">
-            <a:spAutoFit/>
-          </a:bodyPr>
-          <a:lstStyle/>
-          <a:p>
-            <a:pPr algn="l"/>
-            <a:r>
-              <a:rPr sz="1100" b="0" i="0">
-                <a:solidFill>
-                  <a:srgbClr val="404040"/>
-                </a:solidFill>
-                <a:latin typeface="Times New Roman"/>
-              </a:rPr>
-              <a:t>• Operating-lease liabilities are excluded from Net Debt — material for AMZN (~$80B+) and modest for others; EV understates economic leverage proportionally.</a:t>
-            </a:r>
-          </a:p>
-        </p:txBody>
-      </p:sp>
-      <p:sp>
-        <p:nvSpPr>
-          <p:cNvPr id="19" name="TextBox 18"/>
-          <p:cNvSpPr txBox="1"/>
-          <p:nvPr/>
-        </p:nvSpPr>
-        <p:spPr>
-          <a:xfrm>
-            <a:off x="640080" y="5980176"/>
-            <a:ext cx="11247120" cy="457200"/>
-          </a:xfrm>
-          <a:prstGeom prst="rect">
-            <a:avLst/>
-          </a:prstGeom>
-          <a:noFill/>
-        </p:spPr>
-        <p:txBody>
-          <a:bodyPr wrap="square" lIns="45720" rIns="45720" anchor="t">
-            <a:spAutoFit/>
-          </a:bodyPr>
-          <a:lstStyle/>
-          <a:p>
-            <a:pPr algn="l"/>
-            <a:r>
-              <a:rPr sz="1100" b="0" i="0">
-                <a:solidFill>
-                  <a:srgbClr val="404040"/>
-                </a:solidFill>
-                <a:latin typeface="Times New Roman"/>
-              </a:rPr>
-              <a:t>• AMZN consolidated multiples include AWS — they materially distort a 'retail-only' comparison. A clean comparison would require segment-level disaggregation.</a:t>
-            </a:r>
-          </a:p>
-        </p:txBody>
-      </p:sp>
-      <p:sp>
-        <p:nvSpPr>
-          <p:cNvPr id="20" name="TextBox 19"/>
-          <p:cNvSpPr txBox="1"/>
-          <p:nvPr/>
-        </p:nvSpPr>
-        <p:spPr>
-          <a:xfrm>
-            <a:off x="640080" y="6309360"/>
-            <a:ext cx="11247120" cy="457200"/>
-          </a:xfrm>
-          <a:prstGeom prst="rect">
-            <a:avLst/>
-          </a:prstGeom>
-          <a:noFill/>
-        </p:spPr>
-        <p:txBody>
-          <a:bodyPr wrap="square" lIns="45720" rIns="45720" anchor="t">
-            <a:spAutoFit/>
-          </a:bodyPr>
-          <a:lstStyle/>
-          <a:p>
-            <a:pPr algn="l"/>
-            <a:r>
-              <a:rPr sz="1100" b="0" i="0">
-                <a:solidFill>
-                  <a:srgbClr val="404040"/>
-                </a:solidFill>
-                <a:latin typeface="Times New Roman"/>
-              </a:rPr>
-              <a:t>• This research is for educational/decision-framing use only and is not investment advice.</a:t>
-            </a:r>
-          </a:p>
-        </p:txBody>
-      </p:sp>
-      <p:sp>
-        <p:nvSpPr>
-          <p:cNvPr id="21" name="TextBox 20"/>
+              <a:t>• Net: WMT has re-rated significantly on the Connect / marketplace narrative; the margin of safety is gone at today's price.</a:t>
+            </a:r>
+          </a:p>
+        </p:txBody>
+      </p:sp>
+      <p:sp>
+        <p:nvSpPr>
+          <p:cNvPr id="7" name="TextBox 6"/>
           <p:cNvSpPr txBox="1"/>
           <p:nvPr/>
         </p:nvSpPr>
@@ -11801,7 +11737,7 @@
                 </a:solidFill>
                 <a:latin typeface="Times New Roman"/>
               </a:rPr>
-              <a:t>Built per the `competitive-analysis` and `comps-analysis` skills in financial-services/plugins/vertical-plugins/financial-analysis. Companion file: WMT-Comps-Analysis.xlsx.</a:t>
+              <a:t>Source: WMT-Model.xlsx (validated, 0 formula errors); WMT-Comps-Analysis.xlsx. DCF computed via verify_model.py cross-check.</a:t>
             </a:r>
           </a:p>
         </p:txBody>
@@ -11814,7 +11750,7 @@
 </p:sld>
 </file>
 
-<file path=ppt/slides/slide2.xml><?xml version="1.0" encoding="utf-8"?>
+<file path=ppt/slides/slide19.xml><?xml version="1.0" encoding="utf-8"?>
 <p:sld xmlns:a="http://schemas.openxmlformats.org/drawingml/2006/main" xmlns:p="http://schemas.openxmlformats.org/presentationml/2006/main" xmlns:r="http://schemas.openxmlformats.org/officeDocument/2006/relationships">
   <p:cSld>
     <p:spTree>
@@ -11897,6 +11833,1551 @@
                 </a:solidFill>
                 <a:latin typeface="Times New Roman"/>
               </a:rPr>
+              <a:t>Valuation II — base-case DCF $70/share; entire WACC × growth grid mostly below $95.50</a:t>
+            </a:r>
+          </a:p>
+        </p:txBody>
+      </p:sp>
+      <p:graphicFrame>
+        <p:nvGraphicFramePr>
+          <p:cNvPr id="4" name="Table 3"/>
+          <p:cNvGraphicFramePr>
+            <a:graphicFrameLocks noGrp="1"/>
+          </p:cNvGraphicFramePr>
+          <p:nvPr/>
+        </p:nvGraphicFramePr>
+        <p:xfrm>
+          <a:off x="457200" y="1280160"/>
+          <a:ext cx="5120640" cy="4023360"/>
+        </p:xfrm>
+        <a:graphic>
+          <a:graphicData uri="http://schemas.openxmlformats.org/drawingml/2006/table">
+            <a:tbl>
+              <a:tblPr firstRow="1" bandRow="1">
+                <a:tableStyleId>{5C22544A-7EE6-4342-B048-85BDC9FD1C3A}</a:tableStyleId>
+              </a:tblPr>
+              <a:tblGrid>
+                <a:gridCol w="3108960"/>
+                <a:gridCol w="2011680"/>
+              </a:tblGrid>
+              <a:tr h="402336">
+                <a:tc>
+                  <a:txBody>
+                    <a:bodyPr/>
+                    <a:lstStyle/>
+                    <a:p>
+                      <a:r>
+                        <a:rPr sz="1200" b="1">
+                          <a:solidFill>
+                            <a:srgbClr val="FFFFFF"/>
+                          </a:solidFill>
+                          <a:latin typeface="Times New Roman"/>
+                        </a:rPr>
+                        <a:t>DCF bridge (base)</a:t>
+                      </a:r>
+                    </a:p>
+                  </a:txBody>
+                  <a:tcPr marL="45720" marR="45720" marT="36576" marB="36576">
+                    <a:solidFill>
+                      <a:srgbClr val="17365D"/>
+                    </a:solidFill>
+                  </a:tcPr>
+                </a:tc>
+                <a:tc>
+                  <a:txBody>
+                    <a:bodyPr/>
+                    <a:lstStyle/>
+                    <a:p>
+                      <a:r>
+                        <a:rPr sz="1200" b="1">
+                          <a:solidFill>
+                            <a:srgbClr val="FFFFFF"/>
+                          </a:solidFill>
+                          <a:latin typeface="Times New Roman"/>
+                        </a:rPr>
+                        <a:t>$M / $</a:t>
+                      </a:r>
+                    </a:p>
+                  </a:txBody>
+                  <a:tcPr marL="45720" marR="45720" marT="36576" marB="36576">
+                    <a:solidFill>
+                      <a:srgbClr val="17365D"/>
+                    </a:solidFill>
+                  </a:tcPr>
+                </a:tc>
+              </a:tr>
+              <a:tr h="402336">
+                <a:tc>
+                  <a:txBody>
+                    <a:bodyPr/>
+                    <a:lstStyle/>
+                    <a:p>
+                      <a:r>
+                        <a:rPr sz="1200" b="1">
+                          <a:solidFill>
+                            <a:srgbClr val="17365D"/>
+                          </a:solidFill>
+                          <a:latin typeface="Times New Roman"/>
+                        </a:rPr>
+                        <a:t>PV of explicit FCF (FY27-31)</a:t>
+                      </a:r>
+                    </a:p>
+                  </a:txBody>
+                  <a:tcPr marL="45720" marR="45720" marT="36576" marB="36576">
+                    <a:solidFill>
+                      <a:srgbClr val="FFFFFF"/>
+                    </a:solidFill>
+                  </a:tcPr>
+                </a:tc>
+                <a:tc>
+                  <a:txBody>
+                    <a:bodyPr/>
+                    <a:lstStyle/>
+                    <a:p>
+                      <a:r>
+                        <a:rPr sz="1200">
+                          <a:solidFill>
+                            <a:srgbClr val="404040"/>
+                          </a:solidFill>
+                          <a:latin typeface="Times New Roman"/>
+                        </a:rPr>
+                        <a:t>103,749</a:t>
+                      </a:r>
+                    </a:p>
+                  </a:txBody>
+                  <a:tcPr marL="45720" marR="45720" marT="36576" marB="36576">
+                    <a:solidFill>
+                      <a:srgbClr val="FFFFFF"/>
+                    </a:solidFill>
+                  </a:tcPr>
+                </a:tc>
+              </a:tr>
+              <a:tr h="402336">
+                <a:tc>
+                  <a:txBody>
+                    <a:bodyPr/>
+                    <a:lstStyle/>
+                    <a:p>
+                      <a:r>
+                        <a:rPr sz="1200" b="1">
+                          <a:solidFill>
+                            <a:srgbClr val="17365D"/>
+                          </a:solidFill>
+                          <a:latin typeface="Times New Roman"/>
+                        </a:rPr>
+                        <a:t>PV of terminal value</a:t>
+                      </a:r>
+                    </a:p>
+                  </a:txBody>
+                  <a:tcPr marL="45720" marR="45720" marT="36576" marB="36576">
+                    <a:solidFill>
+                      <a:srgbClr val="F2F2F2"/>
+                    </a:solidFill>
+                  </a:tcPr>
+                </a:tc>
+                <a:tc>
+                  <a:txBody>
+                    <a:bodyPr/>
+                    <a:lstStyle/>
+                    <a:p>
+                      <a:r>
+                        <a:rPr sz="1200">
+                          <a:solidFill>
+                            <a:srgbClr val="404040"/>
+                          </a:solidFill>
+                          <a:latin typeface="Times New Roman"/>
+                        </a:rPr>
+                        <a:t>505,840</a:t>
+                      </a:r>
+                    </a:p>
+                  </a:txBody>
+                  <a:tcPr marL="45720" marR="45720" marT="36576" marB="36576">
+                    <a:solidFill>
+                      <a:srgbClr val="F2F2F2"/>
+                    </a:solidFill>
+                  </a:tcPr>
+                </a:tc>
+              </a:tr>
+              <a:tr h="402336">
+                <a:tc>
+                  <a:txBody>
+                    <a:bodyPr/>
+                    <a:lstStyle/>
+                    <a:p>
+                      <a:r>
+                        <a:rPr sz="1200" b="1">
+                          <a:solidFill>
+                            <a:srgbClr val="17365D"/>
+                          </a:solidFill>
+                          <a:latin typeface="Times New Roman"/>
+                        </a:rPr>
+                        <a:t>Enterprise value</a:t>
+                      </a:r>
+                    </a:p>
+                  </a:txBody>
+                  <a:tcPr marL="45720" marR="45720" marT="36576" marB="36576">
+                    <a:solidFill>
+                      <a:srgbClr val="FFFFFF"/>
+                    </a:solidFill>
+                  </a:tcPr>
+                </a:tc>
+                <a:tc>
+                  <a:txBody>
+                    <a:bodyPr/>
+                    <a:lstStyle/>
+                    <a:p>
+                      <a:r>
+                        <a:rPr sz="1200">
+                          <a:solidFill>
+                            <a:srgbClr val="404040"/>
+                          </a:solidFill>
+                          <a:latin typeface="Times New Roman"/>
+                        </a:rPr>
+                        <a:t>609,589</a:t>
+                      </a:r>
+                    </a:p>
+                  </a:txBody>
+                  <a:tcPr marL="45720" marR="45720" marT="36576" marB="36576">
+                    <a:solidFill>
+                      <a:srgbClr val="FFFFFF"/>
+                    </a:solidFill>
+                  </a:tcPr>
+                </a:tc>
+              </a:tr>
+              <a:tr h="402336">
+                <a:tc>
+                  <a:txBody>
+                    <a:bodyPr/>
+                    <a:lstStyle/>
+                    <a:p>
+                      <a:r>
+                        <a:rPr sz="1200" b="1">
+                          <a:solidFill>
+                            <a:srgbClr val="17365D"/>
+                          </a:solidFill>
+                          <a:latin typeface="Times New Roman"/>
+                        </a:rPr>
+                        <a:t>(–) Net debt</a:t>
+                      </a:r>
+                    </a:p>
+                  </a:txBody>
+                  <a:tcPr marL="45720" marR="45720" marT="36576" marB="36576">
+                    <a:solidFill>
+                      <a:srgbClr val="F2F2F2"/>
+                    </a:solidFill>
+                  </a:tcPr>
+                </a:tc>
+                <a:tc>
+                  <a:txBody>
+                    <a:bodyPr/>
+                    <a:lstStyle/>
+                    <a:p>
+                      <a:r>
+                        <a:rPr sz="1200">
+                          <a:solidFill>
+                            <a:srgbClr val="404040"/>
+                          </a:solidFill>
+                          <a:latin typeface="Times New Roman"/>
+                        </a:rPr>
+                        <a:t>(49,000)</a:t>
+                      </a:r>
+                    </a:p>
+                  </a:txBody>
+                  <a:tcPr marL="45720" marR="45720" marT="36576" marB="36576">
+                    <a:solidFill>
+                      <a:srgbClr val="F2F2F2"/>
+                    </a:solidFill>
+                  </a:tcPr>
+                </a:tc>
+              </a:tr>
+              <a:tr h="402336">
+                <a:tc>
+                  <a:txBody>
+                    <a:bodyPr/>
+                    <a:lstStyle/>
+                    <a:p>
+                      <a:r>
+                        <a:rPr sz="1200" b="1">
+                          <a:solidFill>
+                            <a:srgbClr val="17365D"/>
+                          </a:solidFill>
+                          <a:latin typeface="Times New Roman"/>
+                        </a:rPr>
+                        <a:t>Equity value</a:t>
+                      </a:r>
+                    </a:p>
+                  </a:txBody>
+                  <a:tcPr marL="45720" marR="45720" marT="36576" marB="36576">
+                    <a:solidFill>
+                      <a:srgbClr val="FFFFFF"/>
+                    </a:solidFill>
+                  </a:tcPr>
+                </a:tc>
+                <a:tc>
+                  <a:txBody>
+                    <a:bodyPr/>
+                    <a:lstStyle/>
+                    <a:p>
+                      <a:r>
+                        <a:rPr sz="1200">
+                          <a:solidFill>
+                            <a:srgbClr val="404040"/>
+                          </a:solidFill>
+                          <a:latin typeface="Times New Roman"/>
+                        </a:rPr>
+                        <a:t>560,589</a:t>
+                      </a:r>
+                    </a:p>
+                  </a:txBody>
+                  <a:tcPr marL="45720" marR="45720" marT="36576" marB="36576">
+                    <a:solidFill>
+                      <a:srgbClr val="FFFFFF"/>
+                    </a:solidFill>
+                  </a:tcPr>
+                </a:tc>
+              </a:tr>
+              <a:tr h="402336">
+                <a:tc>
+                  <a:txBody>
+                    <a:bodyPr/>
+                    <a:lstStyle/>
+                    <a:p>
+                      <a:r>
+                        <a:rPr sz="1200" b="1">
+                          <a:solidFill>
+                            <a:srgbClr val="17365D"/>
+                          </a:solidFill>
+                          <a:latin typeface="Times New Roman"/>
+                        </a:rPr>
+                        <a:t>÷ Diluted shares (M)</a:t>
+                      </a:r>
+                    </a:p>
+                  </a:txBody>
+                  <a:tcPr marL="45720" marR="45720" marT="36576" marB="36576">
+                    <a:solidFill>
+                      <a:srgbClr val="F2F2F2"/>
+                    </a:solidFill>
+                  </a:tcPr>
+                </a:tc>
+                <a:tc>
+                  <a:txBody>
+                    <a:bodyPr/>
+                    <a:lstStyle/>
+                    <a:p>
+                      <a:r>
+                        <a:rPr sz="1200">
+                          <a:solidFill>
+                            <a:srgbClr val="404040"/>
+                          </a:solidFill>
+                          <a:latin typeface="Times New Roman"/>
+                        </a:rPr>
+                        <a:t>8,050</a:t>
+                      </a:r>
+                    </a:p>
+                  </a:txBody>
+                  <a:tcPr marL="45720" marR="45720" marT="36576" marB="36576">
+                    <a:solidFill>
+                      <a:srgbClr val="F2F2F2"/>
+                    </a:solidFill>
+                  </a:tcPr>
+                </a:tc>
+              </a:tr>
+              <a:tr h="402336">
+                <a:tc>
+                  <a:txBody>
+                    <a:bodyPr/>
+                    <a:lstStyle/>
+                    <a:p>
+                      <a:r>
+                        <a:rPr sz="1200" b="1">
+                          <a:solidFill>
+                            <a:srgbClr val="17365D"/>
+                          </a:solidFill>
+                          <a:latin typeface="Times New Roman"/>
+                        </a:rPr>
+                        <a:t>Implied value / share</a:t>
+                      </a:r>
+                    </a:p>
+                  </a:txBody>
+                  <a:tcPr marL="45720" marR="45720" marT="36576" marB="36576">
+                    <a:solidFill>
+                      <a:srgbClr val="FFFFFF"/>
+                    </a:solidFill>
+                  </a:tcPr>
+                </a:tc>
+                <a:tc>
+                  <a:txBody>
+                    <a:bodyPr/>
+                    <a:lstStyle/>
+                    <a:p>
+                      <a:r>
+                        <a:rPr sz="1200">
+                          <a:solidFill>
+                            <a:srgbClr val="404040"/>
+                          </a:solidFill>
+                          <a:latin typeface="Times New Roman"/>
+                        </a:rPr>
+                        <a:t>$69.64</a:t>
+                      </a:r>
+                    </a:p>
+                  </a:txBody>
+                  <a:tcPr marL="45720" marR="45720" marT="36576" marB="36576">
+                    <a:solidFill>
+                      <a:srgbClr val="FFFFFF"/>
+                    </a:solidFill>
+                  </a:tcPr>
+                </a:tc>
+              </a:tr>
+              <a:tr h="402336">
+                <a:tc>
+                  <a:txBody>
+                    <a:bodyPr/>
+                    <a:lstStyle/>
+                    <a:p>
+                      <a:r>
+                        <a:rPr sz="1200" b="1">
+                          <a:solidFill>
+                            <a:srgbClr val="17365D"/>
+                          </a:solidFill>
+                          <a:latin typeface="Times New Roman"/>
+                        </a:rPr>
+                        <a:t>Current price</a:t>
+                      </a:r>
+                    </a:p>
+                  </a:txBody>
+                  <a:tcPr marL="45720" marR="45720" marT="36576" marB="36576">
+                    <a:solidFill>
+                      <a:srgbClr val="F2F2F2"/>
+                    </a:solidFill>
+                  </a:tcPr>
+                </a:tc>
+                <a:tc>
+                  <a:txBody>
+                    <a:bodyPr/>
+                    <a:lstStyle/>
+                    <a:p>
+                      <a:r>
+                        <a:rPr sz="1200">
+                          <a:solidFill>
+                            <a:srgbClr val="404040"/>
+                          </a:solidFill>
+                          <a:latin typeface="Times New Roman"/>
+                        </a:rPr>
+                        <a:t>$95.50</a:t>
+                      </a:r>
+                    </a:p>
+                  </a:txBody>
+                  <a:tcPr marL="45720" marR="45720" marT="36576" marB="36576">
+                    <a:solidFill>
+                      <a:srgbClr val="F2F2F2"/>
+                    </a:solidFill>
+                  </a:tcPr>
+                </a:tc>
+              </a:tr>
+              <a:tr h="402336">
+                <a:tc>
+                  <a:txBody>
+                    <a:bodyPr/>
+                    <a:lstStyle/>
+                    <a:p>
+                      <a:r>
+                        <a:rPr sz="1200" b="1">
+                          <a:solidFill>
+                            <a:srgbClr val="17365D"/>
+                          </a:solidFill>
+                          <a:latin typeface="Times New Roman"/>
+                        </a:rPr>
+                        <a:t>Upside / (downside)</a:t>
+                      </a:r>
+                    </a:p>
+                  </a:txBody>
+                  <a:tcPr marL="45720" marR="45720" marT="36576" marB="36576">
+                    <a:solidFill>
+                      <a:srgbClr val="FFFFFF"/>
+                    </a:solidFill>
+                  </a:tcPr>
+                </a:tc>
+                <a:tc>
+                  <a:txBody>
+                    <a:bodyPr/>
+                    <a:lstStyle/>
+                    <a:p>
+                      <a:r>
+                        <a:rPr sz="1200">
+                          <a:solidFill>
+                            <a:srgbClr val="404040"/>
+                          </a:solidFill>
+                          <a:latin typeface="Times New Roman"/>
+                        </a:rPr>
+                        <a:t>(27.1%)</a:t>
+                      </a:r>
+                    </a:p>
+                  </a:txBody>
+                  <a:tcPr marL="45720" marR="45720" marT="36576" marB="36576">
+                    <a:solidFill>
+                      <a:srgbClr val="FFFFFF"/>
+                    </a:solidFill>
+                  </a:tcPr>
+                </a:tc>
+              </a:tr>
+            </a:tbl>
+          </a:graphicData>
+        </a:graphic>
+      </p:graphicFrame>
+      <p:sp>
+        <p:nvSpPr>
+          <p:cNvPr id="5" name="TextBox 4"/>
+          <p:cNvSpPr txBox="1"/>
+          <p:nvPr/>
+        </p:nvSpPr>
+        <p:spPr>
+          <a:xfrm>
+            <a:off x="5852160" y="1280160"/>
+            <a:ext cx="5852160" cy="365760"/>
+          </a:xfrm>
+          <a:prstGeom prst="rect">
+            <a:avLst/>
+          </a:prstGeom>
+          <a:noFill/>
+        </p:spPr>
+        <p:txBody>
+          <a:bodyPr wrap="square" lIns="45720" rIns="45720" anchor="t">
+            <a:spAutoFit/>
+          </a:bodyPr>
+          <a:lstStyle/>
+          <a:p>
+            <a:pPr algn="l"/>
+            <a:r>
+              <a:rPr sz="1200" b="1" i="0">
+                <a:solidFill>
+                  <a:srgbClr val="17365D"/>
+                </a:solidFill>
+                <a:latin typeface="Times New Roman"/>
+              </a:rPr>
+              <a:t>Sensitivity — implied $/share (WACC × terminal g)</a:t>
+            </a:r>
+          </a:p>
+        </p:txBody>
+      </p:sp>
+      <p:graphicFrame>
+        <p:nvGraphicFramePr>
+          <p:cNvPr id="6" name="Table 5"/>
+          <p:cNvGraphicFramePr>
+            <a:graphicFrameLocks noGrp="1"/>
+          </p:cNvGraphicFramePr>
+          <p:nvPr/>
+        </p:nvGraphicFramePr>
+        <p:xfrm>
+          <a:off x="5852160" y="1691640"/>
+          <a:ext cx="5897880" cy="2743200"/>
+        </p:xfrm>
+        <a:graphic>
+          <a:graphicData uri="http://schemas.openxmlformats.org/drawingml/2006/table">
+            <a:tbl>
+              <a:tblPr firstRow="1" bandRow="1">
+                <a:tableStyleId>{5C22544A-7EE6-4342-B048-85BDC9FD1C3A}</a:tableStyleId>
+              </a:tblPr>
+              <a:tblGrid>
+                <a:gridCol w="1554480"/>
+                <a:gridCol w="868680"/>
+                <a:gridCol w="868680"/>
+                <a:gridCol w="868680"/>
+                <a:gridCol w="868680"/>
+                <a:gridCol w="868680"/>
+              </a:tblGrid>
+              <a:tr h="457200">
+                <a:tc>
+                  <a:txBody>
+                    <a:bodyPr/>
+                    <a:lstStyle/>
+                    <a:p>
+                      <a:r>
+                        <a:rPr sz="1050" b="1">
+                          <a:solidFill>
+                            <a:srgbClr val="FFFFFF"/>
+                          </a:solidFill>
+                          <a:latin typeface="Times New Roman"/>
+                        </a:rPr>
+                        <a:t>WACC ↓ / g →</a:t>
+                      </a:r>
+                    </a:p>
+                  </a:txBody>
+                  <a:tcPr marL="45720" marR="45720" marT="36576" marB="36576">
+                    <a:solidFill>
+                      <a:srgbClr val="17365D"/>
+                    </a:solidFill>
+                  </a:tcPr>
+                </a:tc>
+                <a:tc>
+                  <a:txBody>
+                    <a:bodyPr/>
+                    <a:lstStyle/>
+                    <a:p>
+                      <a:r>
+                        <a:rPr sz="1050" b="1">
+                          <a:solidFill>
+                            <a:srgbClr val="FFFFFF"/>
+                          </a:solidFill>
+                          <a:latin typeface="Times New Roman"/>
+                        </a:rPr>
+                        <a:t>1.5%</a:t>
+                      </a:r>
+                    </a:p>
+                  </a:txBody>
+                  <a:tcPr marL="45720" marR="45720" marT="36576" marB="36576">
+                    <a:solidFill>
+                      <a:srgbClr val="17365D"/>
+                    </a:solidFill>
+                  </a:tcPr>
+                </a:tc>
+                <a:tc>
+                  <a:txBody>
+                    <a:bodyPr/>
+                    <a:lstStyle/>
+                    <a:p>
+                      <a:r>
+                        <a:rPr sz="1050" b="1">
+                          <a:solidFill>
+                            <a:srgbClr val="FFFFFF"/>
+                          </a:solidFill>
+                          <a:latin typeface="Times New Roman"/>
+                        </a:rPr>
+                        <a:t>2.0%</a:t>
+                      </a:r>
+                    </a:p>
+                  </a:txBody>
+                  <a:tcPr marL="45720" marR="45720" marT="36576" marB="36576">
+                    <a:solidFill>
+                      <a:srgbClr val="17365D"/>
+                    </a:solidFill>
+                  </a:tcPr>
+                </a:tc>
+                <a:tc>
+                  <a:txBody>
+                    <a:bodyPr/>
+                    <a:lstStyle/>
+                    <a:p>
+                      <a:r>
+                        <a:rPr sz="1050" b="1">
+                          <a:solidFill>
+                            <a:srgbClr val="FFFFFF"/>
+                          </a:solidFill>
+                          <a:latin typeface="Times New Roman"/>
+                        </a:rPr>
+                        <a:t>2.5%</a:t>
+                      </a:r>
+                    </a:p>
+                  </a:txBody>
+                  <a:tcPr marL="45720" marR="45720" marT="36576" marB="36576">
+                    <a:solidFill>
+                      <a:srgbClr val="17365D"/>
+                    </a:solidFill>
+                  </a:tcPr>
+                </a:tc>
+                <a:tc>
+                  <a:txBody>
+                    <a:bodyPr/>
+                    <a:lstStyle/>
+                    <a:p>
+                      <a:r>
+                        <a:rPr sz="1050" b="1">
+                          <a:solidFill>
+                            <a:srgbClr val="FFFFFF"/>
+                          </a:solidFill>
+                          <a:latin typeface="Times New Roman"/>
+                        </a:rPr>
+                        <a:t>3.0%</a:t>
+                      </a:r>
+                    </a:p>
+                  </a:txBody>
+                  <a:tcPr marL="45720" marR="45720" marT="36576" marB="36576">
+                    <a:solidFill>
+                      <a:srgbClr val="17365D"/>
+                    </a:solidFill>
+                  </a:tcPr>
+                </a:tc>
+                <a:tc>
+                  <a:txBody>
+                    <a:bodyPr/>
+                    <a:lstStyle/>
+                    <a:p>
+                      <a:r>
+                        <a:rPr sz="1050" b="1">
+                          <a:solidFill>
+                            <a:srgbClr val="FFFFFF"/>
+                          </a:solidFill>
+                          <a:latin typeface="Times New Roman"/>
+                        </a:rPr>
+                        <a:t>3.5%</a:t>
+                      </a:r>
+                    </a:p>
+                  </a:txBody>
+                  <a:tcPr marL="45720" marR="45720" marT="36576" marB="36576">
+                    <a:solidFill>
+                      <a:srgbClr val="17365D"/>
+                    </a:solidFill>
+                  </a:tcPr>
+                </a:tc>
+              </a:tr>
+              <a:tr h="457200">
+                <a:tc>
+                  <a:txBody>
+                    <a:bodyPr/>
+                    <a:lstStyle/>
+                    <a:p>
+                      <a:r>
+                        <a:rPr sz="1050" b="1">
+                          <a:solidFill>
+                            <a:srgbClr val="17365D"/>
+                          </a:solidFill>
+                          <a:latin typeface="Times New Roman"/>
+                        </a:rPr>
+                        <a:t>6.0%</a:t>
+                      </a:r>
+                    </a:p>
+                  </a:txBody>
+                  <a:tcPr marL="45720" marR="45720" marT="36576" marB="36576">
+                    <a:solidFill>
+                      <a:srgbClr val="FFFFFF"/>
+                    </a:solidFill>
+                  </a:tcPr>
+                </a:tc>
+                <a:tc>
+                  <a:txBody>
+                    <a:bodyPr/>
+                    <a:lstStyle/>
+                    <a:p>
+                      <a:r>
+                        <a:rPr sz="1050">
+                          <a:solidFill>
+                            <a:srgbClr val="404040"/>
+                          </a:solidFill>
+                          <a:latin typeface="Times New Roman"/>
+                        </a:rPr>
+                        <a:t>73</a:t>
+                      </a:r>
+                    </a:p>
+                  </a:txBody>
+                  <a:tcPr marL="45720" marR="45720" marT="36576" marB="36576">
+                    <a:solidFill>
+                      <a:srgbClr val="FFFFFF"/>
+                    </a:solidFill>
+                  </a:tcPr>
+                </a:tc>
+                <a:tc>
+                  <a:txBody>
+                    <a:bodyPr/>
+                    <a:lstStyle/>
+                    <a:p>
+                      <a:r>
+                        <a:rPr sz="1050">
+                          <a:solidFill>
+                            <a:srgbClr val="404040"/>
+                          </a:solidFill>
+                          <a:latin typeface="Times New Roman"/>
+                        </a:rPr>
+                        <a:t>81</a:t>
+                      </a:r>
+                    </a:p>
+                  </a:txBody>
+                  <a:tcPr marL="45720" marR="45720" marT="36576" marB="36576">
+                    <a:solidFill>
+                      <a:srgbClr val="FFFFFF"/>
+                    </a:solidFill>
+                  </a:tcPr>
+                </a:tc>
+                <a:tc>
+                  <a:txBody>
+                    <a:bodyPr/>
+                    <a:lstStyle/>
+                    <a:p>
+                      <a:r>
+                        <a:rPr sz="1050">
+                          <a:solidFill>
+                            <a:srgbClr val="404040"/>
+                          </a:solidFill>
+                          <a:latin typeface="Times New Roman"/>
+                        </a:rPr>
+                        <a:t>92</a:t>
+                      </a:r>
+                    </a:p>
+                  </a:txBody>
+                  <a:tcPr marL="45720" marR="45720" marT="36576" marB="36576">
+                    <a:solidFill>
+                      <a:srgbClr val="FFFFFF"/>
+                    </a:solidFill>
+                  </a:tcPr>
+                </a:tc>
+                <a:tc>
+                  <a:txBody>
+                    <a:bodyPr/>
+                    <a:lstStyle/>
+                    <a:p>
+                      <a:r>
+                        <a:rPr sz="1050">
+                          <a:solidFill>
+                            <a:srgbClr val="404040"/>
+                          </a:solidFill>
+                          <a:latin typeface="Times New Roman"/>
+                        </a:rPr>
+                        <a:t>107</a:t>
+                      </a:r>
+                    </a:p>
+                  </a:txBody>
+                  <a:tcPr marL="45720" marR="45720" marT="36576" marB="36576">
+                    <a:solidFill>
+                      <a:srgbClr val="FFFFFF"/>
+                    </a:solidFill>
+                  </a:tcPr>
+                </a:tc>
+                <a:tc>
+                  <a:txBody>
+                    <a:bodyPr/>
+                    <a:lstStyle/>
+                    <a:p>
+                      <a:r>
+                        <a:rPr sz="1050">
+                          <a:solidFill>
+                            <a:srgbClr val="404040"/>
+                          </a:solidFill>
+                          <a:latin typeface="Times New Roman"/>
+                        </a:rPr>
+                        <a:t>127</a:t>
+                      </a:r>
+                    </a:p>
+                  </a:txBody>
+                  <a:tcPr marL="45720" marR="45720" marT="36576" marB="36576">
+                    <a:solidFill>
+                      <a:srgbClr val="FFFFFF"/>
+                    </a:solidFill>
+                  </a:tcPr>
+                </a:tc>
+              </a:tr>
+              <a:tr h="457200">
+                <a:tc>
+                  <a:txBody>
+                    <a:bodyPr/>
+                    <a:lstStyle/>
+                    <a:p>
+                      <a:r>
+                        <a:rPr sz="1050" b="1">
+                          <a:solidFill>
+                            <a:srgbClr val="17365D"/>
+                          </a:solidFill>
+                          <a:latin typeface="Times New Roman"/>
+                        </a:rPr>
+                        <a:t>6.5%</a:t>
+                      </a:r>
+                    </a:p>
+                  </a:txBody>
+                  <a:tcPr marL="45720" marR="45720" marT="36576" marB="36576">
+                    <a:solidFill>
+                      <a:srgbClr val="F2F2F2"/>
+                    </a:solidFill>
+                  </a:tcPr>
+                </a:tc>
+                <a:tc>
+                  <a:txBody>
+                    <a:bodyPr/>
+                    <a:lstStyle/>
+                    <a:p>
+                      <a:r>
+                        <a:rPr sz="1050">
+                          <a:solidFill>
+                            <a:srgbClr val="404040"/>
+                          </a:solidFill>
+                          <a:latin typeface="Times New Roman"/>
+                        </a:rPr>
+                        <a:t>65</a:t>
+                      </a:r>
+                    </a:p>
+                  </a:txBody>
+                  <a:tcPr marL="45720" marR="45720" marT="36576" marB="36576">
+                    <a:solidFill>
+                      <a:srgbClr val="F2F2F2"/>
+                    </a:solidFill>
+                  </a:tcPr>
+                </a:tc>
+                <a:tc>
+                  <a:txBody>
+                    <a:bodyPr/>
+                    <a:lstStyle/>
+                    <a:p>
+                      <a:r>
+                        <a:rPr sz="1050">
+                          <a:solidFill>
+                            <a:srgbClr val="404040"/>
+                          </a:solidFill>
+                          <a:latin typeface="Times New Roman"/>
+                        </a:rPr>
+                        <a:t>71</a:t>
+                      </a:r>
+                    </a:p>
+                  </a:txBody>
+                  <a:tcPr marL="45720" marR="45720" marT="36576" marB="36576">
+                    <a:solidFill>
+                      <a:srgbClr val="F2F2F2"/>
+                    </a:solidFill>
+                  </a:tcPr>
+                </a:tc>
+                <a:tc>
+                  <a:txBody>
+                    <a:bodyPr/>
+                    <a:lstStyle/>
+                    <a:p>
+                      <a:r>
+                        <a:rPr sz="1050">
+                          <a:solidFill>
+                            <a:srgbClr val="404040"/>
+                          </a:solidFill>
+                          <a:latin typeface="Times New Roman"/>
+                        </a:rPr>
+                        <a:t>80</a:t>
+                      </a:r>
+                    </a:p>
+                  </a:txBody>
+                  <a:tcPr marL="45720" marR="45720" marT="36576" marB="36576">
+                    <a:solidFill>
+                      <a:srgbClr val="F2F2F2"/>
+                    </a:solidFill>
+                  </a:tcPr>
+                </a:tc>
+                <a:tc>
+                  <a:txBody>
+                    <a:bodyPr/>
+                    <a:lstStyle/>
+                    <a:p>
+                      <a:r>
+                        <a:rPr sz="1050">
+                          <a:solidFill>
+                            <a:srgbClr val="404040"/>
+                          </a:solidFill>
+                          <a:latin typeface="Times New Roman"/>
+                        </a:rPr>
+                        <a:t>90</a:t>
+                      </a:r>
+                    </a:p>
+                  </a:txBody>
+                  <a:tcPr marL="45720" marR="45720" marT="36576" marB="36576">
+                    <a:solidFill>
+                      <a:srgbClr val="F2F2F2"/>
+                    </a:solidFill>
+                  </a:tcPr>
+                </a:tc>
+                <a:tc>
+                  <a:txBody>
+                    <a:bodyPr/>
+                    <a:lstStyle/>
+                    <a:p>
+                      <a:r>
+                        <a:rPr sz="1050">
+                          <a:solidFill>
+                            <a:srgbClr val="404040"/>
+                          </a:solidFill>
+                          <a:latin typeface="Times New Roman"/>
+                        </a:rPr>
+                        <a:t>105</a:t>
+                      </a:r>
+                    </a:p>
+                  </a:txBody>
+                  <a:tcPr marL="45720" marR="45720" marT="36576" marB="36576">
+                    <a:solidFill>
+                      <a:srgbClr val="F2F2F2"/>
+                    </a:solidFill>
+                  </a:tcPr>
+                </a:tc>
+              </a:tr>
+              <a:tr h="457200">
+                <a:tc>
+                  <a:txBody>
+                    <a:bodyPr/>
+                    <a:lstStyle/>
+                    <a:p>
+                      <a:r>
+                        <a:rPr sz="1050" b="1">
+                          <a:solidFill>
+                            <a:srgbClr val="17365D"/>
+                          </a:solidFill>
+                          <a:latin typeface="Times New Roman"/>
+                        </a:rPr>
+                        <a:t>7.0% (base)</a:t>
+                      </a:r>
+                    </a:p>
+                  </a:txBody>
+                  <a:tcPr marL="45720" marR="45720" marT="36576" marB="36576">
+                    <a:solidFill>
+                      <a:srgbClr val="FFFFFF"/>
+                    </a:solidFill>
+                  </a:tcPr>
+                </a:tc>
+                <a:tc>
+                  <a:txBody>
+                    <a:bodyPr/>
+                    <a:lstStyle/>
+                    <a:p>
+                      <a:r>
+                        <a:rPr sz="1050">
+                          <a:solidFill>
+                            <a:srgbClr val="404040"/>
+                          </a:solidFill>
+                          <a:latin typeface="Times New Roman"/>
+                        </a:rPr>
+                        <a:t>58</a:t>
+                      </a:r>
+                    </a:p>
+                  </a:txBody>
+                  <a:tcPr marL="45720" marR="45720" marT="36576" marB="36576">
+                    <a:solidFill>
+                      <a:srgbClr val="FFFFFF"/>
+                    </a:solidFill>
+                  </a:tcPr>
+                </a:tc>
+                <a:tc>
+                  <a:txBody>
+                    <a:bodyPr/>
+                    <a:lstStyle/>
+                    <a:p>
+                      <a:r>
+                        <a:rPr sz="1050">
+                          <a:solidFill>
+                            <a:srgbClr val="404040"/>
+                          </a:solidFill>
+                          <a:latin typeface="Times New Roman"/>
+                        </a:rPr>
+                        <a:t>63</a:t>
+                      </a:r>
+                    </a:p>
+                  </a:txBody>
+                  <a:tcPr marL="45720" marR="45720" marT="36576" marB="36576">
+                    <a:solidFill>
+                      <a:srgbClr val="FFFFFF"/>
+                    </a:solidFill>
+                  </a:tcPr>
+                </a:tc>
+                <a:tc>
+                  <a:txBody>
+                    <a:bodyPr/>
+                    <a:lstStyle/>
+                    <a:p>
+                      <a:r>
+                        <a:rPr sz="1050">
+                          <a:solidFill>
+                            <a:srgbClr val="404040"/>
+                          </a:solidFill>
+                          <a:latin typeface="Times New Roman"/>
+                        </a:rPr>
+                        <a:t>70</a:t>
+                      </a:r>
+                    </a:p>
+                  </a:txBody>
+                  <a:tcPr marL="45720" marR="45720" marT="36576" marB="36576">
+                    <a:solidFill>
+                      <a:srgbClr val="FFFFFF"/>
+                    </a:solidFill>
+                  </a:tcPr>
+                </a:tc>
+                <a:tc>
+                  <a:txBody>
+                    <a:bodyPr/>
+                    <a:lstStyle/>
+                    <a:p>
+                      <a:r>
+                        <a:rPr sz="1050">
+                          <a:solidFill>
+                            <a:srgbClr val="404040"/>
+                          </a:solidFill>
+                          <a:latin typeface="Times New Roman"/>
+                        </a:rPr>
+                        <a:t>78</a:t>
+                      </a:r>
+                    </a:p>
+                  </a:txBody>
+                  <a:tcPr marL="45720" marR="45720" marT="36576" marB="36576">
+                    <a:solidFill>
+                      <a:srgbClr val="FFFFFF"/>
+                    </a:solidFill>
+                  </a:tcPr>
+                </a:tc>
+                <a:tc>
+                  <a:txBody>
+                    <a:bodyPr/>
+                    <a:lstStyle/>
+                    <a:p>
+                      <a:r>
+                        <a:rPr sz="1050">
+                          <a:solidFill>
+                            <a:srgbClr val="404040"/>
+                          </a:solidFill>
+                          <a:latin typeface="Times New Roman"/>
+                        </a:rPr>
+                        <a:t>89</a:t>
+                      </a:r>
+                    </a:p>
+                  </a:txBody>
+                  <a:tcPr marL="45720" marR="45720" marT="36576" marB="36576">
+                    <a:solidFill>
+                      <a:srgbClr val="FFFFFF"/>
+                    </a:solidFill>
+                  </a:tcPr>
+                </a:tc>
+              </a:tr>
+              <a:tr h="457200">
+                <a:tc>
+                  <a:txBody>
+                    <a:bodyPr/>
+                    <a:lstStyle/>
+                    <a:p>
+                      <a:r>
+                        <a:rPr sz="1050" b="1">
+                          <a:solidFill>
+                            <a:srgbClr val="17365D"/>
+                          </a:solidFill>
+                          <a:latin typeface="Times New Roman"/>
+                        </a:rPr>
+                        <a:t>7.5%</a:t>
+                      </a:r>
+                    </a:p>
+                  </a:txBody>
+                  <a:tcPr marL="45720" marR="45720" marT="36576" marB="36576">
+                    <a:solidFill>
+                      <a:srgbClr val="F2F2F2"/>
+                    </a:solidFill>
+                  </a:tcPr>
+                </a:tc>
+                <a:tc>
+                  <a:txBody>
+                    <a:bodyPr/>
+                    <a:lstStyle/>
+                    <a:p>
+                      <a:r>
+                        <a:rPr sz="1050">
+                          <a:solidFill>
+                            <a:srgbClr val="404040"/>
+                          </a:solidFill>
+                          <a:latin typeface="Times New Roman"/>
+                        </a:rPr>
+                        <a:t>52</a:t>
+                      </a:r>
+                    </a:p>
+                  </a:txBody>
+                  <a:tcPr marL="45720" marR="45720" marT="36576" marB="36576">
+                    <a:solidFill>
+                      <a:srgbClr val="F2F2F2"/>
+                    </a:solidFill>
+                  </a:tcPr>
+                </a:tc>
+                <a:tc>
+                  <a:txBody>
+                    <a:bodyPr/>
+                    <a:lstStyle/>
+                    <a:p>
+                      <a:r>
+                        <a:rPr sz="1050">
+                          <a:solidFill>
+                            <a:srgbClr val="404040"/>
+                          </a:solidFill>
+                          <a:latin typeface="Times New Roman"/>
+                        </a:rPr>
+                        <a:t>57</a:t>
+                      </a:r>
+                    </a:p>
+                  </a:txBody>
+                  <a:tcPr marL="45720" marR="45720" marT="36576" marB="36576">
+                    <a:solidFill>
+                      <a:srgbClr val="F2F2F2"/>
+                    </a:solidFill>
+                  </a:tcPr>
+                </a:tc>
+                <a:tc>
+                  <a:txBody>
+                    <a:bodyPr/>
+                    <a:lstStyle/>
+                    <a:p>
+                      <a:r>
+                        <a:rPr sz="1050">
+                          <a:solidFill>
+                            <a:srgbClr val="404040"/>
+                          </a:solidFill>
+                          <a:latin typeface="Times New Roman"/>
+                        </a:rPr>
+                        <a:t>62</a:t>
+                      </a:r>
+                    </a:p>
+                  </a:txBody>
+                  <a:tcPr marL="45720" marR="45720" marT="36576" marB="36576">
+                    <a:solidFill>
+                      <a:srgbClr val="F2F2F2"/>
+                    </a:solidFill>
+                  </a:tcPr>
+                </a:tc>
+                <a:tc>
+                  <a:txBody>
+                    <a:bodyPr/>
+                    <a:lstStyle/>
+                    <a:p>
+                      <a:r>
+                        <a:rPr sz="1050">
+                          <a:solidFill>
+                            <a:srgbClr val="404040"/>
+                          </a:solidFill>
+                          <a:latin typeface="Times New Roman"/>
+                        </a:rPr>
+                        <a:t>69</a:t>
+                      </a:r>
+                    </a:p>
+                  </a:txBody>
+                  <a:tcPr marL="45720" marR="45720" marT="36576" marB="36576">
+                    <a:solidFill>
+                      <a:srgbClr val="F2F2F2"/>
+                    </a:solidFill>
+                  </a:tcPr>
+                </a:tc>
+                <a:tc>
+                  <a:txBody>
+                    <a:bodyPr/>
+                    <a:lstStyle/>
+                    <a:p>
+                      <a:r>
+                        <a:rPr sz="1050">
+                          <a:solidFill>
+                            <a:srgbClr val="404040"/>
+                          </a:solidFill>
+                          <a:latin typeface="Times New Roman"/>
+                        </a:rPr>
+                        <a:t>77</a:t>
+                      </a:r>
+                    </a:p>
+                  </a:txBody>
+                  <a:tcPr marL="45720" marR="45720" marT="36576" marB="36576">
+                    <a:solidFill>
+                      <a:srgbClr val="F2F2F2"/>
+                    </a:solidFill>
+                  </a:tcPr>
+                </a:tc>
+              </a:tr>
+              <a:tr h="457200">
+                <a:tc>
+                  <a:txBody>
+                    <a:bodyPr/>
+                    <a:lstStyle/>
+                    <a:p>
+                      <a:r>
+                        <a:rPr sz="1050" b="1">
+                          <a:solidFill>
+                            <a:srgbClr val="17365D"/>
+                          </a:solidFill>
+                          <a:latin typeface="Times New Roman"/>
+                        </a:rPr>
+                        <a:t>8.0%</a:t>
+                      </a:r>
+                    </a:p>
+                  </a:txBody>
+                  <a:tcPr marL="45720" marR="45720" marT="36576" marB="36576">
+                    <a:solidFill>
+                      <a:srgbClr val="FFFFFF"/>
+                    </a:solidFill>
+                  </a:tcPr>
+                </a:tc>
+                <a:tc>
+                  <a:txBody>
+                    <a:bodyPr/>
+                    <a:lstStyle/>
+                    <a:p>
+                      <a:r>
+                        <a:rPr sz="1050">
+                          <a:solidFill>
+                            <a:srgbClr val="404040"/>
+                          </a:solidFill>
+                          <a:latin typeface="Times New Roman"/>
+                        </a:rPr>
+                        <a:t>48</a:t>
+                      </a:r>
+                    </a:p>
+                  </a:txBody>
+                  <a:tcPr marL="45720" marR="45720" marT="36576" marB="36576">
+                    <a:solidFill>
+                      <a:srgbClr val="FFFFFF"/>
+                    </a:solidFill>
+                  </a:tcPr>
+                </a:tc>
+                <a:tc>
+                  <a:txBody>
+                    <a:bodyPr/>
+                    <a:lstStyle/>
+                    <a:p>
+                      <a:r>
+                        <a:rPr sz="1050">
+                          <a:solidFill>
+                            <a:srgbClr val="404040"/>
+                          </a:solidFill>
+                          <a:latin typeface="Times New Roman"/>
+                        </a:rPr>
+                        <a:t>51</a:t>
+                      </a:r>
+                    </a:p>
+                  </a:txBody>
+                  <a:tcPr marL="45720" marR="45720" marT="36576" marB="36576">
+                    <a:solidFill>
+                      <a:srgbClr val="FFFFFF"/>
+                    </a:solidFill>
+                  </a:tcPr>
+                </a:tc>
+                <a:tc>
+                  <a:txBody>
+                    <a:bodyPr/>
+                    <a:lstStyle/>
+                    <a:p>
+                      <a:r>
+                        <a:rPr sz="1050">
+                          <a:solidFill>
+                            <a:srgbClr val="404040"/>
+                          </a:solidFill>
+                          <a:latin typeface="Times New Roman"/>
+                        </a:rPr>
+                        <a:t>56</a:t>
+                      </a:r>
+                    </a:p>
+                  </a:txBody>
+                  <a:tcPr marL="45720" marR="45720" marT="36576" marB="36576">
+                    <a:solidFill>
+                      <a:srgbClr val="FFFFFF"/>
+                    </a:solidFill>
+                  </a:tcPr>
+                </a:tc>
+                <a:tc>
+                  <a:txBody>
+                    <a:bodyPr/>
+                    <a:lstStyle/>
+                    <a:p>
+                      <a:r>
+                        <a:rPr sz="1050">
+                          <a:solidFill>
+                            <a:srgbClr val="404040"/>
+                          </a:solidFill>
+                          <a:latin typeface="Times New Roman"/>
+                        </a:rPr>
+                        <a:t>61</a:t>
+                      </a:r>
+                    </a:p>
+                  </a:txBody>
+                  <a:tcPr marL="45720" marR="45720" marT="36576" marB="36576">
+                    <a:solidFill>
+                      <a:srgbClr val="FFFFFF"/>
+                    </a:solidFill>
+                  </a:tcPr>
+                </a:tc>
+                <a:tc>
+                  <a:txBody>
+                    <a:bodyPr/>
+                    <a:lstStyle/>
+                    <a:p>
+                      <a:r>
+                        <a:rPr sz="1050">
+                          <a:solidFill>
+                            <a:srgbClr val="404040"/>
+                          </a:solidFill>
+                          <a:latin typeface="Times New Roman"/>
+                        </a:rPr>
+                        <a:t>67</a:t>
+                      </a:r>
+                    </a:p>
+                  </a:txBody>
+                  <a:tcPr marL="45720" marR="45720" marT="36576" marB="36576">
+                    <a:solidFill>
+                      <a:srgbClr val="FFFFFF"/>
+                    </a:solidFill>
+                  </a:tcPr>
+                </a:tc>
+              </a:tr>
+            </a:tbl>
+          </a:graphicData>
+        </a:graphic>
+      </p:graphicFrame>
+      <p:sp>
+        <p:nvSpPr>
+          <p:cNvPr id="7" name="TextBox 6"/>
+          <p:cNvSpPr txBox="1"/>
+          <p:nvPr/>
+        </p:nvSpPr>
+        <p:spPr>
+          <a:xfrm>
+            <a:off x="5852160" y="4572000"/>
+            <a:ext cx="5943600" cy="1737360"/>
+          </a:xfrm>
+          <a:prstGeom prst="rect">
+            <a:avLst/>
+          </a:prstGeom>
+          <a:noFill/>
+        </p:spPr>
+        <p:txBody>
+          <a:bodyPr wrap="square" lIns="45720" rIns="45720" anchor="t">
+            <a:spAutoFit/>
+          </a:bodyPr>
+          <a:lstStyle/>
+          <a:p>
+            <a:pPr algn="l"/>
+            <a:r>
+              <a:rPr sz="1100" b="0" i="0">
+                <a:solidFill>
+                  <a:srgbClr val="404040"/>
+                </a:solidFill>
+                <a:latin typeface="Times New Roman"/>
+              </a:rPr>
+              <a:t>• Center cell ($70) = base case. Terminal value is ~83% of EV — very WACC/g-sensitive (mature retail).</a:t>
+            </a:r>
+          </a:p>
+          <a:p>
+            <a:pPr algn="l"/>
+            <a:r>
+              <a:rPr sz="1100" b="0" i="0">
+                <a:solidFill>
+                  <a:srgbClr val="404040"/>
+                </a:solidFill>
+                <a:latin typeface="Times New Roman"/>
+              </a:rPr>
+              <a:t>• Only the bull corner (6.0% / 3.5%) at $127 exceeds the $95.50 market price.</a:t>
+            </a:r>
+          </a:p>
+          <a:p>
+            <a:pPr algn="l"/>
+            <a:r>
+              <a:rPr sz="1100" b="0" i="0">
+                <a:solidFill>
+                  <a:srgbClr val="404040"/>
+                </a:solidFill>
+                <a:latin typeface="Times New Roman"/>
+              </a:rPr>
+              <a:t>• Implication: WMT's narrative re-rating (Connect ads, marketplace, membership) is largely priced in.</a:t>
+            </a:r>
+          </a:p>
+        </p:txBody>
+      </p:sp>
+      <p:sp>
+        <p:nvSpPr>
+          <p:cNvPr id="8" name="TextBox 7"/>
+          <p:cNvSpPr txBox="1"/>
+          <p:nvPr/>
+        </p:nvSpPr>
+        <p:spPr>
+          <a:xfrm>
+            <a:off x="457200" y="6492240"/>
+            <a:ext cx="11247120" cy="274320"/>
+          </a:xfrm>
+          <a:prstGeom prst="rect">
+            <a:avLst/>
+          </a:prstGeom>
+          <a:noFill/>
+        </p:spPr>
+        <p:txBody>
+          <a:bodyPr wrap="square" lIns="45720" rIns="45720" anchor="t">
+            <a:spAutoFit/>
+          </a:bodyPr>
+          <a:lstStyle/>
+          <a:p>
+            <a:pPr algn="l"/>
+            <a:r>
+              <a:rPr sz="900" b="0" i="1">
+                <a:solidFill>
+                  <a:srgbClr val="BFBFBF"/>
+                </a:solidFill>
+                <a:latin typeface="Times New Roman"/>
+              </a:rPr>
+              <a:t>Source: WMT-Model.xlsx (validated, 0 formula errors). Lower WACC (7%) and terminal g (2.5%) than AVGO — defensive consumer-staple profile.</a:t>
+            </a:r>
+          </a:p>
+        </p:txBody>
+      </p:sp>
+    </p:spTree>
+  </p:cSld>
+  <p:clrMapOvr>
+    <a:masterClrMapping/>
+  </p:clrMapOvr>
+</p:sld>
+</file>
+
+<file path=ppt/slides/slide2.xml><?xml version="1.0" encoding="utf-8"?>
+<p:sld xmlns:a="http://schemas.openxmlformats.org/drawingml/2006/main" xmlns:p="http://schemas.openxmlformats.org/presentationml/2006/main" xmlns:r="http://schemas.openxmlformats.org/officeDocument/2006/relationships">
+  <p:cSld>
+    <p:spTree>
+      <p:nvGrpSpPr>
+        <p:cNvPr id="1" name=""/>
+        <p:cNvGrpSpPr/>
+        <p:nvPr/>
+      </p:nvGrpSpPr>
+      <p:grpSpPr/>
+      <p:sp>
+        <p:nvSpPr>
+          <p:cNvPr id="2" name="Rectangle 1"/>
+          <p:cNvSpPr/>
+          <p:nvPr/>
+        </p:nvSpPr>
+        <p:spPr>
+          <a:xfrm>
+            <a:off x="0" y="0"/>
+            <a:ext cx="12191695" cy="91440"/>
+          </a:xfrm>
+          <a:prstGeom prst="rect">
+            <a:avLst/>
+          </a:prstGeom>
+          <a:solidFill>
+            <a:srgbClr val="FFC220"/>
+          </a:solidFill>
+          <a:ln>
+            <a:noFill/>
+          </a:ln>
+        </p:spPr>
+        <p:style>
+          <a:lnRef idx="1">
+            <a:schemeClr val="accent1"/>
+          </a:lnRef>
+          <a:fillRef idx="3">
+            <a:schemeClr val="accent1"/>
+          </a:fillRef>
+          <a:effectRef idx="2">
+            <a:schemeClr val="accent1"/>
+          </a:effectRef>
+          <a:fontRef idx="minor">
+            <a:schemeClr val="lt1"/>
+          </a:fontRef>
+        </p:style>
+        <p:txBody>
+          <a:bodyPr rtlCol="0" anchor="ctr"/>
+          <a:lstStyle/>
+          <a:p>
+            <a:pPr algn="ctr"/>
+          </a:p>
+        </p:txBody>
+      </p:sp>
+      <p:sp>
+        <p:nvSpPr>
+          <p:cNvPr id="3" name="TextBox 2"/>
+          <p:cNvSpPr txBox="1"/>
+          <p:nvPr/>
+        </p:nvSpPr>
+        <p:spPr>
+          <a:xfrm>
+            <a:off x="457200" y="182880"/>
+            <a:ext cx="11247120" cy="822960"/>
+          </a:xfrm>
+          <a:prstGeom prst="rect">
+            <a:avLst/>
+          </a:prstGeom>
+          <a:noFill/>
+        </p:spPr>
+        <p:txBody>
+          <a:bodyPr wrap="square" lIns="45720" rIns="45720" anchor="t">
+            <a:spAutoFit/>
+          </a:bodyPr>
+          <a:lstStyle/>
+          <a:p>
+            <a:pPr algn="l"/>
+            <a:r>
+              <a:rPr sz="2600" b="1" i="0">
+                <a:solidFill>
+                  <a:srgbClr val="17365D"/>
+                </a:solidFill>
+                <a:latin typeface="Times New Roman"/>
+              </a:rPr>
               <a:t>Scale + omnichannel flywheel + ad/marketplace mix = a re-rating story, not a retail story</a:t>
             </a:r>
           </a:p>
@@ -12213,6 +13694,732 @@
                 <a:latin typeface="Times New Roman"/>
               </a:rPr>
               <a:t>Sources: WMT Q1 FY26 10-Q and IR commentary (May 2026); StockAnalysis.com; companion .xlsx Notes tab for full source list.</a:t>
+            </a:r>
+          </a:p>
+        </p:txBody>
+      </p:sp>
+    </p:spTree>
+  </p:cSld>
+  <p:clrMapOvr>
+    <a:masterClrMapping/>
+  </p:clrMapOvr>
+</p:sld>
+</file>
+
+<file path=ppt/slides/slide20.xml><?xml version="1.0" encoding="utf-8"?>
+<p:sld xmlns:a="http://schemas.openxmlformats.org/drawingml/2006/main" xmlns:p="http://schemas.openxmlformats.org/presentationml/2006/main" xmlns:r="http://schemas.openxmlformats.org/officeDocument/2006/relationships">
+  <p:cSld>
+    <p:spTree>
+      <p:nvGrpSpPr>
+        <p:cNvPr id="1" name=""/>
+        <p:cNvGrpSpPr/>
+        <p:nvPr/>
+      </p:nvGrpSpPr>
+      <p:grpSpPr/>
+      <p:sp>
+        <p:nvSpPr>
+          <p:cNvPr id="2" name="Rectangle 1"/>
+          <p:cNvSpPr/>
+          <p:nvPr/>
+        </p:nvSpPr>
+        <p:spPr>
+          <a:xfrm>
+            <a:off x="0" y="0"/>
+            <a:ext cx="12191695" cy="91440"/>
+          </a:xfrm>
+          <a:prstGeom prst="rect">
+            <a:avLst/>
+          </a:prstGeom>
+          <a:solidFill>
+            <a:srgbClr val="FFC220"/>
+          </a:solidFill>
+          <a:ln>
+            <a:noFill/>
+          </a:ln>
+        </p:spPr>
+        <p:style>
+          <a:lnRef idx="1">
+            <a:schemeClr val="accent1"/>
+          </a:lnRef>
+          <a:fillRef idx="3">
+            <a:schemeClr val="accent1"/>
+          </a:fillRef>
+          <a:effectRef idx="2">
+            <a:schemeClr val="accent1"/>
+          </a:effectRef>
+          <a:fontRef idx="minor">
+            <a:schemeClr val="lt1"/>
+          </a:fontRef>
+        </p:style>
+        <p:txBody>
+          <a:bodyPr rtlCol="0" anchor="ctr"/>
+          <a:lstStyle/>
+          <a:p>
+            <a:pPr algn="ctr"/>
+          </a:p>
+        </p:txBody>
+      </p:sp>
+      <p:sp>
+        <p:nvSpPr>
+          <p:cNvPr id="3" name="TextBox 2"/>
+          <p:cNvSpPr txBox="1"/>
+          <p:nvPr/>
+        </p:nvSpPr>
+        <p:spPr>
+          <a:xfrm>
+            <a:off x="457200" y="182880"/>
+            <a:ext cx="11247120" cy="822960"/>
+          </a:xfrm>
+          <a:prstGeom prst="rect">
+            <a:avLst/>
+          </a:prstGeom>
+          <a:noFill/>
+        </p:spPr>
+        <p:txBody>
+          <a:bodyPr wrap="square" lIns="45720" rIns="45720" anchor="t">
+            <a:spAutoFit/>
+          </a:bodyPr>
+          <a:lstStyle/>
+          <a:p>
+            <a:pPr algn="l"/>
+            <a:r>
+              <a:rPr sz="2600" b="1" i="0">
+                <a:solidFill>
+                  <a:srgbClr val="17365D"/>
+                </a:solidFill>
+                <a:latin typeface="Times New Roman"/>
+              </a:rPr>
+              <a:t>Sources, data gaps, and caveats</a:t>
+            </a:r>
+          </a:p>
+        </p:txBody>
+      </p:sp>
+      <p:sp>
+        <p:nvSpPr>
+          <p:cNvPr id="4" name="TextBox 3"/>
+          <p:cNvSpPr txBox="1"/>
+          <p:nvPr/>
+        </p:nvSpPr>
+        <p:spPr>
+          <a:xfrm>
+            <a:off x="457200" y="1280160"/>
+            <a:ext cx="11247120" cy="365760"/>
+          </a:xfrm>
+          <a:prstGeom prst="rect">
+            <a:avLst/>
+          </a:prstGeom>
+          <a:noFill/>
+        </p:spPr>
+        <p:txBody>
+          <a:bodyPr wrap="square" lIns="45720" rIns="45720" anchor="t">
+            <a:spAutoFit/>
+          </a:bodyPr>
+          <a:lstStyle/>
+          <a:p>
+            <a:pPr algn="l"/>
+            <a:r>
+              <a:rPr sz="1400" b="1" i="0">
+                <a:solidFill>
+                  <a:srgbClr val="17365D"/>
+                </a:solidFill>
+                <a:latin typeface="Times New Roman"/>
+              </a:rPr>
+              <a:t>Primary sources</a:t>
+            </a:r>
+          </a:p>
+        </p:txBody>
+      </p:sp>
+      <p:sp>
+        <p:nvSpPr>
+          <p:cNvPr id="5" name="TextBox 4"/>
+          <p:cNvSpPr txBox="1"/>
+          <p:nvPr/>
+        </p:nvSpPr>
+        <p:spPr>
+          <a:xfrm>
+            <a:off x="640080" y="1691640"/>
+            <a:ext cx="11247120" cy="274320"/>
+          </a:xfrm>
+          <a:prstGeom prst="rect">
+            <a:avLst/>
+          </a:prstGeom>
+          <a:noFill/>
+        </p:spPr>
+        <p:txBody>
+          <a:bodyPr wrap="square" lIns="45720" rIns="45720" anchor="t">
+            <a:spAutoFit/>
+          </a:bodyPr>
+          <a:lstStyle/>
+          <a:p>
+            <a:pPr algn="l"/>
+            <a:r>
+              <a:rPr sz="1100" b="0" i="0">
+                <a:solidFill>
+                  <a:srgbClr val="404040"/>
+                </a:solidFill>
+                <a:latin typeface="Times New Roman"/>
+              </a:rPr>
+              <a:t>• Walmart Q1 FY26 earnings release and 10-Q (May 2026); WMT 10-K FY25 (Mar 2026)</a:t>
+            </a:r>
+          </a:p>
+        </p:txBody>
+      </p:sp>
+      <p:sp>
+        <p:nvSpPr>
+          <p:cNvPr id="6" name="TextBox 5"/>
+          <p:cNvSpPr txBox="1"/>
+          <p:nvPr/>
+        </p:nvSpPr>
+        <p:spPr>
+          <a:xfrm>
+            <a:off x="640080" y="1965960"/>
+            <a:ext cx="11247120" cy="274320"/>
+          </a:xfrm>
+          <a:prstGeom prst="rect">
+            <a:avLst/>
+          </a:prstGeom>
+          <a:noFill/>
+        </p:spPr>
+        <p:txBody>
+          <a:bodyPr wrap="square" lIns="45720" rIns="45720" anchor="t">
+            <a:spAutoFit/>
+          </a:bodyPr>
+          <a:lstStyle/>
+          <a:p>
+            <a:pPr algn="l"/>
+            <a:r>
+              <a:rPr sz="1100" b="0" i="0">
+                <a:solidFill>
+                  <a:srgbClr val="404040"/>
+                </a:solidFill>
+                <a:latin typeface="Times New Roman"/>
+              </a:rPr>
+              <a:t>• Costco — Q3 FY26 monthly sales releases; COST 10-K FY25</a:t>
+            </a:r>
+          </a:p>
+        </p:txBody>
+      </p:sp>
+      <p:sp>
+        <p:nvSpPr>
+          <p:cNvPr id="7" name="TextBox 6"/>
+          <p:cNvSpPr txBox="1"/>
+          <p:nvPr/>
+        </p:nvSpPr>
+        <p:spPr>
+          <a:xfrm>
+            <a:off x="640080" y="2240280"/>
+            <a:ext cx="11247120" cy="274320"/>
+          </a:xfrm>
+          <a:prstGeom prst="rect">
+            <a:avLst/>
+          </a:prstGeom>
+          <a:noFill/>
+        </p:spPr>
+        <p:txBody>
+          <a:bodyPr wrap="square" lIns="45720" rIns="45720" anchor="t">
+            <a:spAutoFit/>
+          </a:bodyPr>
+          <a:lstStyle/>
+          <a:p>
+            <a:pPr algn="l"/>
+            <a:r>
+              <a:rPr sz="1100" b="0" i="0">
+                <a:solidFill>
+                  <a:srgbClr val="404040"/>
+                </a:solidFill>
+                <a:latin typeface="Times New Roman"/>
+              </a:rPr>
+              <a:t>• Target — Q1 FY26 earnings; TGT 10-K FY25</a:t>
+            </a:r>
+          </a:p>
+        </p:txBody>
+      </p:sp>
+      <p:sp>
+        <p:nvSpPr>
+          <p:cNvPr id="8" name="TextBox 7"/>
+          <p:cNvSpPr txBox="1"/>
+          <p:nvPr/>
+        </p:nvSpPr>
+        <p:spPr>
+          <a:xfrm>
+            <a:off x="640080" y="2514600"/>
+            <a:ext cx="11247120" cy="274320"/>
+          </a:xfrm>
+          <a:prstGeom prst="rect">
+            <a:avLst/>
+          </a:prstGeom>
+          <a:noFill/>
+        </p:spPr>
+        <p:txBody>
+          <a:bodyPr wrap="square" lIns="45720" rIns="45720" anchor="t">
+            <a:spAutoFit/>
+          </a:bodyPr>
+          <a:lstStyle/>
+          <a:p>
+            <a:pPr algn="l"/>
+            <a:r>
+              <a:rPr sz="1100" b="0" i="0">
+                <a:solidFill>
+                  <a:srgbClr val="404040"/>
+                </a:solidFill>
+                <a:latin typeface="Times New Roman"/>
+              </a:rPr>
+              <a:t>• Amazon — Q1 FY26 earnings; AMZN 10-K FY25; segment reporting (Advertising Services, AWS)</a:t>
+            </a:r>
+          </a:p>
+        </p:txBody>
+      </p:sp>
+      <p:sp>
+        <p:nvSpPr>
+          <p:cNvPr id="9" name="TextBox 8"/>
+          <p:cNvSpPr txBox="1"/>
+          <p:nvPr/>
+        </p:nvSpPr>
+        <p:spPr>
+          <a:xfrm>
+            <a:off x="640080" y="2788920"/>
+            <a:ext cx="11247120" cy="274320"/>
+          </a:xfrm>
+          <a:prstGeom prst="rect">
+            <a:avLst/>
+          </a:prstGeom>
+          <a:noFill/>
+        </p:spPr>
+        <p:txBody>
+          <a:bodyPr wrap="square" lIns="45720" rIns="45720" anchor="t">
+            <a:spAutoFit/>
+          </a:bodyPr>
+          <a:lstStyle/>
+          <a:p>
+            <a:pPr algn="l"/>
+            <a:r>
+              <a:rPr sz="1100" b="0" i="0">
+                <a:solidFill>
+                  <a:srgbClr val="404040"/>
+                </a:solidFill>
+                <a:latin typeface="Times New Roman"/>
+              </a:rPr>
+              <a:t>• Kroger — Q1 FY26 earnings; KR 10-K FY25</a:t>
+            </a:r>
+          </a:p>
+        </p:txBody>
+      </p:sp>
+      <p:sp>
+        <p:nvSpPr>
+          <p:cNvPr id="10" name="TextBox 9"/>
+          <p:cNvSpPr txBox="1"/>
+          <p:nvPr/>
+        </p:nvSpPr>
+        <p:spPr>
+          <a:xfrm>
+            <a:off x="640080" y="3063240"/>
+            <a:ext cx="11247120" cy="274320"/>
+          </a:xfrm>
+          <a:prstGeom prst="rect">
+            <a:avLst/>
+          </a:prstGeom>
+          <a:noFill/>
+        </p:spPr>
+        <p:txBody>
+          <a:bodyPr wrap="square" lIns="45720" rIns="45720" anchor="t">
+            <a:spAutoFit/>
+          </a:bodyPr>
+          <a:lstStyle/>
+          <a:p>
+            <a:pPr algn="l"/>
+            <a:r>
+              <a:rPr sz="1100" b="0" i="0">
+                <a:solidFill>
+                  <a:srgbClr val="404040"/>
+                </a:solidFill>
+                <a:latin typeface="Times New Roman"/>
+              </a:rPr>
+              <a:t>• BJ's Wholesale — Q1 FY26 earnings; BJ 10-K FY25</a:t>
+            </a:r>
+          </a:p>
+        </p:txBody>
+      </p:sp>
+      <p:sp>
+        <p:nvSpPr>
+          <p:cNvPr id="11" name="TextBox 10"/>
+          <p:cNvSpPr txBox="1"/>
+          <p:nvPr/>
+        </p:nvSpPr>
+        <p:spPr>
+          <a:xfrm>
+            <a:off x="640080" y="3337560"/>
+            <a:ext cx="11247120" cy="274320"/>
+          </a:xfrm>
+          <a:prstGeom prst="rect">
+            <a:avLst/>
+          </a:prstGeom>
+          <a:noFill/>
+        </p:spPr>
+        <p:txBody>
+          <a:bodyPr wrap="square" lIns="45720" rIns="45720" anchor="t">
+            <a:spAutoFit/>
+          </a:bodyPr>
+          <a:lstStyle/>
+          <a:p>
+            <a:pPr algn="l"/>
+            <a:r>
+              <a:rPr sz="1100" b="0" i="0">
+                <a:solidFill>
+                  <a:srgbClr val="404040"/>
+                </a:solidFill>
+                <a:latin typeface="Times New Roman"/>
+              </a:rPr>
+              <a:t>• Market data: StockAnalysis.com, Yahoo Finance (May 2026)</a:t>
+            </a:r>
+          </a:p>
+        </p:txBody>
+      </p:sp>
+      <p:sp>
+        <p:nvSpPr>
+          <p:cNvPr id="12" name="TextBox 11"/>
+          <p:cNvSpPr txBox="1"/>
+          <p:nvPr/>
+        </p:nvSpPr>
+        <p:spPr>
+          <a:xfrm>
+            <a:off x="640080" y="3611880"/>
+            <a:ext cx="11247120" cy="274320"/>
+          </a:xfrm>
+          <a:prstGeom prst="rect">
+            <a:avLst/>
+          </a:prstGeom>
+          <a:noFill/>
+        </p:spPr>
+        <p:txBody>
+          <a:bodyPr wrap="square" lIns="45720" rIns="45720" anchor="t">
+            <a:spAutoFit/>
+          </a:bodyPr>
+          <a:lstStyle/>
+          <a:p>
+            <a:pPr algn="l"/>
+            <a:r>
+              <a:rPr sz="1100" b="0" i="0">
+                <a:solidFill>
+                  <a:srgbClr val="404040"/>
+                </a:solidFill>
+                <a:latin typeface="Times New Roman"/>
+              </a:rPr>
+              <a:t>• Retail-media TAM: eMarketer / IAB US Retail Media report (2025)</a:t>
+            </a:r>
+          </a:p>
+        </p:txBody>
+      </p:sp>
+      <p:sp>
+        <p:nvSpPr>
+          <p:cNvPr id="13" name="TextBox 12"/>
+          <p:cNvSpPr txBox="1"/>
+          <p:nvPr/>
+        </p:nvSpPr>
+        <p:spPr>
+          <a:xfrm>
+            <a:off x="640080" y="3886200"/>
+            <a:ext cx="11247120" cy="274320"/>
+          </a:xfrm>
+          <a:prstGeom prst="rect">
+            <a:avLst/>
+          </a:prstGeom>
+          <a:noFill/>
+        </p:spPr>
+        <p:txBody>
+          <a:bodyPr wrap="square" lIns="45720" rIns="45720" anchor="t">
+            <a:spAutoFit/>
+          </a:bodyPr>
+          <a:lstStyle/>
+          <a:p>
+            <a:pPr algn="l"/>
+            <a:r>
+              <a:rPr sz="1100" b="0" i="0">
+                <a:solidFill>
+                  <a:srgbClr val="404040"/>
+                </a:solidFill>
+                <a:latin typeface="Times New Roman"/>
+              </a:rPr>
+              <a:t>• Industry context: Bain, KeyBanc retail primers; NRF; press coverage (CNBC, Bloomberg)</a:t>
+            </a:r>
+          </a:p>
+        </p:txBody>
+      </p:sp>
+      <p:sp>
+        <p:nvSpPr>
+          <p:cNvPr id="14" name="TextBox 13"/>
+          <p:cNvSpPr txBox="1"/>
+          <p:nvPr/>
+        </p:nvSpPr>
+        <p:spPr>
+          <a:xfrm>
+            <a:off x="457200" y="4251960"/>
+            <a:ext cx="11247120" cy="365760"/>
+          </a:xfrm>
+          <a:prstGeom prst="rect">
+            <a:avLst/>
+          </a:prstGeom>
+          <a:noFill/>
+        </p:spPr>
+        <p:txBody>
+          <a:bodyPr wrap="square" lIns="45720" rIns="45720" anchor="t">
+            <a:spAutoFit/>
+          </a:bodyPr>
+          <a:lstStyle/>
+          <a:p>
+            <a:pPr algn="l"/>
+            <a:r>
+              <a:rPr sz="1400" b="1" i="0">
+                <a:solidFill>
+                  <a:srgbClr val="17365D"/>
+                </a:solidFill>
+                <a:latin typeface="Times New Roman"/>
+              </a:rPr>
+              <a:t>Data gaps and caveats (read before using in a binding decision)</a:t>
+            </a:r>
+          </a:p>
+        </p:txBody>
+      </p:sp>
+      <p:sp>
+        <p:nvSpPr>
+          <p:cNvPr id="15" name="TextBox 14"/>
+          <p:cNvSpPr txBox="1"/>
+          <p:nvPr/>
+        </p:nvSpPr>
+        <p:spPr>
+          <a:xfrm>
+            <a:off x="640080" y="4663440"/>
+            <a:ext cx="11247120" cy="457200"/>
+          </a:xfrm>
+          <a:prstGeom prst="rect">
+            <a:avLst/>
+          </a:prstGeom>
+          <a:noFill/>
+        </p:spPr>
+        <p:txBody>
+          <a:bodyPr wrap="square" lIns="45720" rIns="45720" anchor="t">
+            <a:spAutoFit/>
+          </a:bodyPr>
+          <a:lstStyle/>
+          <a:p>
+            <a:pPr algn="l"/>
+            <a:r>
+              <a:rPr sz="1100" b="0" i="0">
+                <a:solidFill>
+                  <a:srgbClr val="404040"/>
+                </a:solidFill>
+                <a:latin typeface="Times New Roman"/>
+              </a:rPr>
+              <a:t>• MCP data sources (CapIQ / FactSet / Daloopa) WERE NOT USED — the financial-services plugin connectors were not configured in this environment. Numbers should be cross-checked against a terminal before action.</a:t>
+            </a:r>
+          </a:p>
+        </p:txBody>
+      </p:sp>
+      <p:sp>
+        <p:nvSpPr>
+          <p:cNvPr id="16" name="TextBox 15"/>
+          <p:cNvSpPr txBox="1"/>
+          <p:nvPr/>
+        </p:nvSpPr>
+        <p:spPr>
+          <a:xfrm>
+            <a:off x="640080" y="4992624"/>
+            <a:ext cx="11247120" cy="457200"/>
+          </a:xfrm>
+          <a:prstGeom prst="rect">
+            <a:avLst/>
+          </a:prstGeom>
+          <a:noFill/>
+        </p:spPr>
+        <p:txBody>
+          <a:bodyPr wrap="square" lIns="45720" rIns="45720" anchor="t">
+            <a:spAutoFit/>
+          </a:bodyPr>
+          <a:lstStyle/>
+          <a:p>
+            <a:pPr algn="l"/>
+            <a:r>
+              <a:rPr sz="1100" b="0" i="0">
+                <a:solidFill>
+                  <a:srgbClr val="404040"/>
+                </a:solidFill>
+                <a:latin typeface="Times New Roman"/>
+              </a:rPr>
+              <a:t>• [E] flags in the companion .xlsx Inputs tab identify figures estimated from public commentary; cell comments document each assumption.</a:t>
+            </a:r>
+          </a:p>
+        </p:txBody>
+      </p:sp>
+      <p:sp>
+        <p:nvSpPr>
+          <p:cNvPr id="17" name="TextBox 16"/>
+          <p:cNvSpPr txBox="1"/>
+          <p:nvPr/>
+        </p:nvSpPr>
+        <p:spPr>
+          <a:xfrm>
+            <a:off x="640080" y="5321808"/>
+            <a:ext cx="11247120" cy="457200"/>
+          </a:xfrm>
+          <a:prstGeom prst="rect">
+            <a:avLst/>
+          </a:prstGeom>
+          <a:noFill/>
+        </p:spPr>
+        <p:txBody>
+          <a:bodyPr wrap="square" lIns="45720" rIns="45720" anchor="t">
+            <a:spAutoFit/>
+          </a:bodyPr>
+          <a:lstStyle/>
+          <a:p>
+            <a:pPr algn="l"/>
+            <a:r>
+              <a:rPr sz="1100" b="0" i="0">
+                <a:solidFill>
+                  <a:srgbClr val="404040"/>
+                </a:solidFill>
+                <a:latin typeface="Times New Roman"/>
+              </a:rPr>
+              <a:t>• Walmart Connect (ad business) is NOT separately disclosed in WMT filings — the ~$5B run-rate is mgmt commentary aggregated across calls / interviews. Range of estimates: $4–6B.</a:t>
+            </a:r>
+          </a:p>
+        </p:txBody>
+      </p:sp>
+      <p:sp>
+        <p:nvSpPr>
+          <p:cNvPr id="18" name="TextBox 17"/>
+          <p:cNvSpPr txBox="1"/>
+          <p:nvPr/>
+        </p:nvSpPr>
+        <p:spPr>
+          <a:xfrm>
+            <a:off x="640080" y="5650992"/>
+            <a:ext cx="11247120" cy="457200"/>
+          </a:xfrm>
+          <a:prstGeom prst="rect">
+            <a:avLst/>
+          </a:prstGeom>
+          <a:noFill/>
+        </p:spPr>
+        <p:txBody>
+          <a:bodyPr wrap="square" lIns="45720" rIns="45720" anchor="t">
+            <a:spAutoFit/>
+          </a:bodyPr>
+          <a:lstStyle/>
+          <a:p>
+            <a:pPr algn="l"/>
+            <a:r>
+              <a:rPr sz="1100" b="0" i="0">
+                <a:solidFill>
+                  <a:srgbClr val="404040"/>
+                </a:solidFill>
+                <a:latin typeface="Times New Roman"/>
+              </a:rPr>
+              <a:t>• Operating-lease liabilities are excluded from Net Debt — material for AMZN (~$80B+) and modest for others; EV understates economic leverage proportionally.</a:t>
+            </a:r>
+          </a:p>
+        </p:txBody>
+      </p:sp>
+      <p:sp>
+        <p:nvSpPr>
+          <p:cNvPr id="19" name="TextBox 18"/>
+          <p:cNvSpPr txBox="1"/>
+          <p:nvPr/>
+        </p:nvSpPr>
+        <p:spPr>
+          <a:xfrm>
+            <a:off x="640080" y="5980176"/>
+            <a:ext cx="11247120" cy="457200"/>
+          </a:xfrm>
+          <a:prstGeom prst="rect">
+            <a:avLst/>
+          </a:prstGeom>
+          <a:noFill/>
+        </p:spPr>
+        <p:txBody>
+          <a:bodyPr wrap="square" lIns="45720" rIns="45720" anchor="t">
+            <a:spAutoFit/>
+          </a:bodyPr>
+          <a:lstStyle/>
+          <a:p>
+            <a:pPr algn="l"/>
+            <a:r>
+              <a:rPr sz="1100" b="0" i="0">
+                <a:solidFill>
+                  <a:srgbClr val="404040"/>
+                </a:solidFill>
+                <a:latin typeface="Times New Roman"/>
+              </a:rPr>
+              <a:t>• AMZN consolidated multiples include AWS — they materially distort a 'retail-only' comparison. A clean comparison would require segment-level disaggregation.</a:t>
+            </a:r>
+          </a:p>
+        </p:txBody>
+      </p:sp>
+      <p:sp>
+        <p:nvSpPr>
+          <p:cNvPr id="20" name="TextBox 19"/>
+          <p:cNvSpPr txBox="1"/>
+          <p:nvPr/>
+        </p:nvSpPr>
+        <p:spPr>
+          <a:xfrm>
+            <a:off x="640080" y="6309360"/>
+            <a:ext cx="11247120" cy="457200"/>
+          </a:xfrm>
+          <a:prstGeom prst="rect">
+            <a:avLst/>
+          </a:prstGeom>
+          <a:noFill/>
+        </p:spPr>
+        <p:txBody>
+          <a:bodyPr wrap="square" lIns="45720" rIns="45720" anchor="t">
+            <a:spAutoFit/>
+          </a:bodyPr>
+          <a:lstStyle/>
+          <a:p>
+            <a:pPr algn="l"/>
+            <a:r>
+              <a:rPr sz="1100" b="0" i="0">
+                <a:solidFill>
+                  <a:srgbClr val="404040"/>
+                </a:solidFill>
+                <a:latin typeface="Times New Roman"/>
+              </a:rPr>
+              <a:t>• This research is for educational/decision-framing use only and is not investment advice.</a:t>
+            </a:r>
+          </a:p>
+        </p:txBody>
+      </p:sp>
+      <p:sp>
+        <p:nvSpPr>
+          <p:cNvPr id="21" name="TextBox 20"/>
+          <p:cNvSpPr txBox="1"/>
+          <p:nvPr/>
+        </p:nvSpPr>
+        <p:spPr>
+          <a:xfrm>
+            <a:off x="457200" y="6492240"/>
+            <a:ext cx="11247120" cy="274320"/>
+          </a:xfrm>
+          <a:prstGeom prst="rect">
+            <a:avLst/>
+          </a:prstGeom>
+          <a:noFill/>
+        </p:spPr>
+        <p:txBody>
+          <a:bodyPr wrap="square" lIns="45720" rIns="45720" anchor="t">
+            <a:spAutoFit/>
+          </a:bodyPr>
+          <a:lstStyle/>
+          <a:p>
+            <a:pPr algn="l"/>
+            <a:r>
+              <a:rPr sz="900" b="0" i="1">
+                <a:solidFill>
+                  <a:srgbClr val="BFBFBF"/>
+                </a:solidFill>
+                <a:latin typeface="Times New Roman"/>
+              </a:rPr>
+              <a:t>Built per the `competitive-analysis` and `comps-analysis` skills in financial-services/plugins/vertical-plugins/financial-analysis. Companion file: WMT-Comps-Analysis.xlsx.</a:t>
             </a:r>
           </a:p>
         </p:txBody>
